--- a/docs/pptx/whole/ritu-scatter-egfr-cg.pptx
+++ b/docs/pptx/whole/ritu-scatter-egfr-cg.pptx
@@ -3414,7 +3414,7 @@
           </p:nvSpPr>
           <p:spPr>
             <a:xfrm>
-              <a:off x="3159456" y="2975903"/>
+              <a:off x="3159460" y="2975905"/>
               <a:ext cx="49651" cy="49651"/>
             </a:xfrm>
             <a:prstGeom prst="ellipse">
@@ -5199,7 +5199,7 @@
           </p:nvSpPr>
           <p:spPr>
             <a:xfrm>
-              <a:off x="3082878" y="3544751"/>
+              <a:off x="3680722" y="3216657"/>
               <a:ext cx="49651" cy="49651"/>
             </a:xfrm>
             <a:prstGeom prst="ellipse">
@@ -5234,7 +5234,7 @@
           </p:nvSpPr>
           <p:spPr>
             <a:xfrm>
-              <a:off x="3680722" y="3216657"/>
+              <a:off x="4101446" y="2984171"/>
               <a:ext cx="49651" cy="49651"/>
             </a:xfrm>
             <a:prstGeom prst="ellipse">
@@ -5269,7 +5269,7 @@
           </p:nvSpPr>
           <p:spPr>
             <a:xfrm>
-              <a:off x="4101446" y="2984171"/>
+              <a:off x="2775416" y="2690895"/>
               <a:ext cx="49651" cy="49651"/>
             </a:xfrm>
             <a:prstGeom prst="ellipse">
@@ -5304,7 +5304,7 @@
           </p:nvSpPr>
           <p:spPr>
             <a:xfrm>
-              <a:off x="2775416" y="2690895"/>
+              <a:off x="3351125" y="3437975"/>
               <a:ext cx="49651" cy="49651"/>
             </a:xfrm>
             <a:prstGeom prst="ellipse">
@@ -5339,7 +5339,7 @@
           </p:nvSpPr>
           <p:spPr>
             <a:xfrm>
-              <a:off x="3351125" y="3437975"/>
+              <a:off x="3244964" y="2541438"/>
               <a:ext cx="49651" cy="49651"/>
             </a:xfrm>
             <a:prstGeom prst="ellipse">
@@ -5374,7 +5374,7 @@
           </p:nvSpPr>
           <p:spPr>
             <a:xfrm>
-              <a:off x="3244964" y="2541438"/>
+              <a:off x="4170647" y="2624906"/>
               <a:ext cx="49651" cy="49651"/>
             </a:xfrm>
             <a:prstGeom prst="ellipse">
@@ -5409,7 +5409,7 @@
           </p:nvSpPr>
           <p:spPr>
             <a:xfrm>
-              <a:off x="4170647" y="2624906"/>
+              <a:off x="4198327" y="3166982"/>
               <a:ext cx="49651" cy="49651"/>
             </a:xfrm>
             <a:prstGeom prst="ellipse">
@@ -5444,7 +5444,7 @@
           </p:nvSpPr>
           <p:spPr>
             <a:xfrm>
-              <a:off x="4198327" y="3166982"/>
+              <a:off x="3124487" y="3422156"/>
               <a:ext cx="49651" cy="49651"/>
             </a:xfrm>
             <a:prstGeom prst="ellipse">
@@ -5479,7 +5479,7 @@
           </p:nvSpPr>
           <p:spPr>
             <a:xfrm>
-              <a:off x="3124487" y="3422156"/>
+              <a:off x="1701554" y="2421276"/>
               <a:ext cx="49651" cy="49651"/>
             </a:xfrm>
             <a:prstGeom prst="ellipse">
@@ -5514,7 +5514,7 @@
           </p:nvSpPr>
           <p:spPr>
             <a:xfrm>
-              <a:off x="1701554" y="2421276"/>
+              <a:off x="3604510" y="2342755"/>
               <a:ext cx="49651" cy="49651"/>
             </a:xfrm>
             <a:prstGeom prst="ellipse">
@@ -5549,7 +5549,7 @@
           </p:nvSpPr>
           <p:spPr>
             <a:xfrm>
-              <a:off x="3604510" y="2342755"/>
+              <a:off x="4472932" y="3071300"/>
               <a:ext cx="49651" cy="49651"/>
             </a:xfrm>
             <a:prstGeom prst="ellipse">
@@ -5584,7 +5584,7 @@
           </p:nvSpPr>
           <p:spPr>
             <a:xfrm>
-              <a:off x="4472932" y="3071300"/>
+              <a:off x="2953605" y="2528169"/>
               <a:ext cx="49651" cy="49651"/>
             </a:xfrm>
             <a:prstGeom prst="ellipse">
@@ -5619,7 +5619,7 @@
           </p:nvSpPr>
           <p:spPr>
             <a:xfrm>
-              <a:off x="2953605" y="2528169"/>
+              <a:off x="3738750" y="3002997"/>
               <a:ext cx="49651" cy="49651"/>
             </a:xfrm>
             <a:prstGeom prst="ellipse">
@@ -5654,7 +5654,7 @@
           </p:nvSpPr>
           <p:spPr>
             <a:xfrm>
-              <a:off x="3738750" y="3002997"/>
+              <a:off x="2648886" y="2795464"/>
               <a:ext cx="49651" cy="49651"/>
             </a:xfrm>
             <a:prstGeom prst="ellipse">
@@ -5689,7 +5689,7 @@
           </p:nvSpPr>
           <p:spPr>
             <a:xfrm>
-              <a:off x="2648886" y="2795464"/>
+              <a:off x="2617965" y="2394413"/>
               <a:ext cx="49651" cy="49651"/>
             </a:xfrm>
             <a:prstGeom prst="ellipse">
@@ -5724,7 +5724,7 @@
           </p:nvSpPr>
           <p:spPr>
             <a:xfrm>
-              <a:off x="2617965" y="2394413"/>
+              <a:off x="4722657" y="3289348"/>
               <a:ext cx="49651" cy="49651"/>
             </a:xfrm>
             <a:prstGeom prst="ellipse">
@@ -5759,7 +5759,7 @@
           </p:nvSpPr>
           <p:spPr>
             <a:xfrm>
-              <a:off x="4722657" y="3289348"/>
+              <a:off x="4764177" y="3515345"/>
               <a:ext cx="49651" cy="49651"/>
             </a:xfrm>
             <a:prstGeom prst="ellipse">
@@ -5794,7 +5794,7 @@
           </p:nvSpPr>
           <p:spPr>
             <a:xfrm>
-              <a:off x="4764177" y="3515345"/>
+              <a:off x="3047830" y="2700140"/>
               <a:ext cx="49651" cy="49651"/>
             </a:xfrm>
             <a:prstGeom prst="ellipse">
@@ -5829,7 +5829,7 @@
           </p:nvSpPr>
           <p:spPr>
             <a:xfrm>
-              <a:off x="3047830" y="2700140"/>
+              <a:off x="4221409" y="3782909"/>
               <a:ext cx="49651" cy="49651"/>
             </a:xfrm>
             <a:prstGeom prst="ellipse">
@@ -5864,7 +5864,7 @@
           </p:nvSpPr>
           <p:spPr>
             <a:xfrm>
-              <a:off x="4221409" y="3782909"/>
+              <a:off x="3784507" y="2323713"/>
               <a:ext cx="49651" cy="49651"/>
             </a:xfrm>
             <a:prstGeom prst="ellipse">
@@ -5899,7 +5899,7 @@
           </p:nvSpPr>
           <p:spPr>
             <a:xfrm>
-              <a:off x="3784507" y="2323713"/>
+              <a:off x="3107458" y="2709721"/>
               <a:ext cx="49651" cy="49651"/>
             </a:xfrm>
             <a:prstGeom prst="ellipse">
@@ -5934,7 +5934,7 @@
           </p:nvSpPr>
           <p:spPr>
             <a:xfrm>
-              <a:off x="3107458" y="2709721"/>
+              <a:off x="3507987" y="2645210"/>
               <a:ext cx="49651" cy="49651"/>
             </a:xfrm>
             <a:prstGeom prst="ellipse">
@@ -5969,7 +5969,7 @@
           </p:nvSpPr>
           <p:spPr>
             <a:xfrm>
-              <a:off x="3507987" y="2645210"/>
+              <a:off x="2440528" y="2862629"/>
               <a:ext cx="49651" cy="49651"/>
             </a:xfrm>
             <a:prstGeom prst="ellipse">
@@ -6004,7 +6004,7 @@
           </p:nvSpPr>
           <p:spPr>
             <a:xfrm>
-              <a:off x="2440528" y="2862629"/>
+              <a:off x="4142810" y="3151700"/>
               <a:ext cx="49651" cy="49651"/>
             </a:xfrm>
             <a:prstGeom prst="ellipse">
@@ -6039,7 +6039,7 @@
           </p:nvSpPr>
           <p:spPr>
             <a:xfrm>
-              <a:off x="4142810" y="3151700"/>
+              <a:off x="2038192" y="2972130"/>
               <a:ext cx="49651" cy="49651"/>
             </a:xfrm>
             <a:prstGeom prst="ellipse">
@@ -6074,7 +6074,7 @@
           </p:nvSpPr>
           <p:spPr>
             <a:xfrm>
-              <a:off x="2038192" y="2972130"/>
+              <a:off x="4733555" y="3227918"/>
               <a:ext cx="49651" cy="49651"/>
             </a:xfrm>
             <a:prstGeom prst="ellipse">
@@ -6109,7 +6109,7 @@
           </p:nvSpPr>
           <p:spPr>
             <a:xfrm>
-              <a:off x="4733555" y="3227918"/>
+              <a:off x="6037040" y="3441390"/>
               <a:ext cx="49651" cy="49651"/>
             </a:xfrm>
             <a:prstGeom prst="ellipse">
@@ -6144,7 +6144,7 @@
           </p:nvSpPr>
           <p:spPr>
             <a:xfrm>
-              <a:off x="6037040" y="3441390"/>
+              <a:off x="2794549" y="2705807"/>
               <a:ext cx="49651" cy="49651"/>
             </a:xfrm>
             <a:prstGeom prst="ellipse">
@@ -6179,7 +6179,7 @@
           </p:nvSpPr>
           <p:spPr>
             <a:xfrm>
-              <a:off x="2794549" y="2705807"/>
+              <a:off x="3478085" y="2730385"/>
               <a:ext cx="49651" cy="49651"/>
             </a:xfrm>
             <a:prstGeom prst="ellipse">
@@ -6214,7 +6214,7 @@
           </p:nvSpPr>
           <p:spPr>
             <a:xfrm>
-              <a:off x="3478085" y="2730385"/>
+              <a:off x="3187331" y="2974574"/>
               <a:ext cx="49651" cy="49651"/>
             </a:xfrm>
             <a:prstGeom prst="ellipse">
@@ -6249,7 +6249,7 @@
           </p:nvSpPr>
           <p:spPr>
             <a:xfrm>
-              <a:off x="3187331" y="2974574"/>
+              <a:off x="3532589" y="3314701"/>
               <a:ext cx="49651" cy="49651"/>
             </a:xfrm>
             <a:prstGeom prst="ellipse">
@@ -6284,7 +6284,7 @@
           </p:nvSpPr>
           <p:spPr>
             <a:xfrm>
-              <a:off x="3532589" y="3314701"/>
+              <a:off x="2848693" y="2388882"/>
               <a:ext cx="49651" cy="49651"/>
             </a:xfrm>
             <a:prstGeom prst="ellipse">
@@ -6319,7 +6319,7 @@
           </p:nvSpPr>
           <p:spPr>
             <a:xfrm>
-              <a:off x="2848693" y="2388882"/>
+              <a:off x="3498869" y="2540184"/>
               <a:ext cx="49651" cy="49651"/>
             </a:xfrm>
             <a:prstGeom prst="ellipse">
@@ -6354,7 +6354,7 @@
           </p:nvSpPr>
           <p:spPr>
             <a:xfrm>
-              <a:off x="3498869" y="2540184"/>
+              <a:off x="4604410" y="3111498"/>
               <a:ext cx="49651" cy="49651"/>
             </a:xfrm>
             <a:prstGeom prst="ellipse">
@@ -6389,7 +6389,7 @@
           </p:nvSpPr>
           <p:spPr>
             <a:xfrm>
-              <a:off x="4604410" y="3111498"/>
+              <a:off x="2662354" y="2553546"/>
               <a:ext cx="49651" cy="49651"/>
             </a:xfrm>
             <a:prstGeom prst="ellipse">
@@ -6424,7 +6424,7 @@
           </p:nvSpPr>
           <p:spPr>
             <a:xfrm>
-              <a:off x="2662354" y="2553546"/>
+              <a:off x="2906326" y="2349255"/>
               <a:ext cx="49651" cy="49651"/>
             </a:xfrm>
             <a:prstGeom prst="ellipse">
@@ -6459,7 +6459,7 @@
           </p:nvSpPr>
           <p:spPr>
             <a:xfrm>
-              <a:off x="2906326" y="2349255"/>
+              <a:off x="2819312" y="2942043"/>
               <a:ext cx="49651" cy="49651"/>
             </a:xfrm>
             <a:prstGeom prst="ellipse">
@@ -6494,7 +6494,7 @@
           </p:nvSpPr>
           <p:spPr>
             <a:xfrm>
-              <a:off x="2819312" y="2942043"/>
+              <a:off x="4680605" y="3244757"/>
               <a:ext cx="49651" cy="49651"/>
             </a:xfrm>
             <a:prstGeom prst="ellipse">
@@ -6529,7 +6529,7 @@
           </p:nvSpPr>
           <p:spPr>
             <a:xfrm>
-              <a:off x="4680605" y="3244757"/>
+              <a:off x="3695610" y="3354859"/>
               <a:ext cx="49651" cy="49651"/>
             </a:xfrm>
             <a:prstGeom prst="ellipse">
@@ -6564,7 +6564,7 @@
           </p:nvSpPr>
           <p:spPr>
             <a:xfrm>
-              <a:off x="3695610" y="3354859"/>
+              <a:off x="4238944" y="2412725"/>
               <a:ext cx="49651" cy="49651"/>
             </a:xfrm>
             <a:prstGeom prst="ellipse">
@@ -6599,7 +6599,7 @@
           </p:nvSpPr>
           <p:spPr>
             <a:xfrm>
-              <a:off x="4238944" y="2412725"/>
+              <a:off x="3501987" y="3404985"/>
               <a:ext cx="49651" cy="49651"/>
             </a:xfrm>
             <a:prstGeom prst="ellipse">
@@ -6634,7 +6634,7 @@
           </p:nvSpPr>
           <p:spPr>
             <a:xfrm>
-              <a:off x="3501987" y="3404985"/>
+              <a:off x="4385095" y="2887912"/>
               <a:ext cx="49651" cy="49651"/>
             </a:xfrm>
             <a:prstGeom prst="ellipse">
@@ -6669,7 +6669,7 @@
           </p:nvSpPr>
           <p:spPr>
             <a:xfrm>
-              <a:off x="4385095" y="2887912"/>
+              <a:off x="4667462" y="3086362"/>
               <a:ext cx="49651" cy="49651"/>
             </a:xfrm>
             <a:prstGeom prst="ellipse">
@@ -6704,7 +6704,7 @@
           </p:nvSpPr>
           <p:spPr>
             <a:xfrm>
-              <a:off x="4667462" y="3086362"/>
+              <a:off x="3298955" y="2045672"/>
               <a:ext cx="49651" cy="49651"/>
             </a:xfrm>
             <a:prstGeom prst="ellipse">
@@ -6739,7 +6739,7 @@
           </p:nvSpPr>
           <p:spPr>
             <a:xfrm>
-              <a:off x="3298955" y="2045672"/>
+              <a:off x="3361111" y="2461511"/>
               <a:ext cx="49651" cy="49651"/>
             </a:xfrm>
             <a:prstGeom prst="ellipse">
@@ -6774,7 +6774,7 @@
           </p:nvSpPr>
           <p:spPr>
             <a:xfrm>
-              <a:off x="3361111" y="2461511"/>
+              <a:off x="7920771" y="4695358"/>
               <a:ext cx="49651" cy="49651"/>
             </a:xfrm>
             <a:prstGeom prst="ellipse">
@@ -6809,7 +6809,7 @@
           </p:nvSpPr>
           <p:spPr>
             <a:xfrm>
-              <a:off x="7920771" y="4695358"/>
+              <a:off x="2230928" y="3181001"/>
               <a:ext cx="49651" cy="49651"/>
             </a:xfrm>
             <a:prstGeom prst="ellipse">
@@ -6844,7 +6844,7 @@
           </p:nvSpPr>
           <p:spPr>
             <a:xfrm>
-              <a:off x="2230928" y="3181001"/>
+              <a:off x="1903423" y="3105262"/>
               <a:ext cx="49651" cy="49651"/>
             </a:xfrm>
             <a:prstGeom prst="ellipse">
@@ -6879,7 +6879,7 @@
           </p:nvSpPr>
           <p:spPr>
             <a:xfrm>
-              <a:off x="1903423" y="3105262"/>
+              <a:off x="3125938" y="2885384"/>
               <a:ext cx="49651" cy="49651"/>
             </a:xfrm>
             <a:prstGeom prst="ellipse">
@@ -6914,7 +6914,7 @@
           </p:nvSpPr>
           <p:spPr>
             <a:xfrm>
-              <a:off x="3125938" y="2885384"/>
+              <a:off x="5285892" y="2720762"/>
               <a:ext cx="49651" cy="49651"/>
             </a:xfrm>
             <a:prstGeom prst="ellipse">
@@ -6949,7 +6949,7 @@
           </p:nvSpPr>
           <p:spPr>
             <a:xfrm>
-              <a:off x="5285892" y="2720762"/>
+              <a:off x="3042449" y="2463996"/>
               <a:ext cx="49651" cy="49651"/>
             </a:xfrm>
             <a:prstGeom prst="ellipse">
@@ -6984,7 +6984,7 @@
           </p:nvSpPr>
           <p:spPr>
             <a:xfrm>
-              <a:off x="3042449" y="2463996"/>
+              <a:off x="4385292" y="3352136"/>
               <a:ext cx="49651" cy="49651"/>
             </a:xfrm>
             <a:prstGeom prst="ellipse">
@@ -7019,7 +7019,7 @@
           </p:nvSpPr>
           <p:spPr>
             <a:xfrm>
-              <a:off x="4385292" y="3352136"/>
+              <a:off x="4958633" y="3080232"/>
               <a:ext cx="49651" cy="49651"/>
             </a:xfrm>
             <a:prstGeom prst="ellipse">
@@ -7054,7 +7054,7 @@
           </p:nvSpPr>
           <p:spPr>
             <a:xfrm>
-              <a:off x="4958633" y="3080232"/>
+              <a:off x="4558888" y="3398673"/>
               <a:ext cx="49651" cy="49651"/>
             </a:xfrm>
             <a:prstGeom prst="ellipse">
@@ -7089,7 +7089,7 @@
           </p:nvSpPr>
           <p:spPr>
             <a:xfrm>
-              <a:off x="4558888" y="3398673"/>
+              <a:off x="1989199" y="3126117"/>
               <a:ext cx="49651" cy="49651"/>
             </a:xfrm>
             <a:prstGeom prst="ellipse">
@@ -7124,7 +7124,7 @@
           </p:nvSpPr>
           <p:spPr>
             <a:xfrm>
-              <a:off x="1989199" y="3126117"/>
+              <a:off x="4459346" y="3327691"/>
               <a:ext cx="49651" cy="49651"/>
             </a:xfrm>
             <a:prstGeom prst="ellipse">
@@ -7159,7 +7159,7 @@
           </p:nvSpPr>
           <p:spPr>
             <a:xfrm>
-              <a:off x="4459346" y="3327691"/>
+              <a:off x="4744633" y="2980916"/>
               <a:ext cx="49651" cy="49651"/>
             </a:xfrm>
             <a:prstGeom prst="ellipse">
@@ -7194,7 +7194,7 @@
           </p:nvSpPr>
           <p:spPr>
             <a:xfrm>
-              <a:off x="4744633" y="2980916"/>
+              <a:off x="3681585" y="2968208"/>
               <a:ext cx="49651" cy="49651"/>
             </a:xfrm>
             <a:prstGeom prst="ellipse">
@@ -7229,7 +7229,7 @@
           </p:nvSpPr>
           <p:spPr>
             <a:xfrm>
-              <a:off x="3681585" y="2968208"/>
+              <a:off x="4870784" y="3609728"/>
               <a:ext cx="49651" cy="49651"/>
             </a:xfrm>
             <a:prstGeom prst="ellipse">
@@ -7264,7 +7264,7 @@
           </p:nvSpPr>
           <p:spPr>
             <a:xfrm>
-              <a:off x="4870784" y="3609728"/>
+              <a:off x="2918927" y="2898570"/>
               <a:ext cx="49651" cy="49651"/>
             </a:xfrm>
             <a:prstGeom prst="ellipse">
@@ -7299,7 +7299,7 @@
           </p:nvSpPr>
           <p:spPr>
             <a:xfrm>
-              <a:off x="2918927" y="2898570"/>
+              <a:off x="4563973" y="3611033"/>
               <a:ext cx="49651" cy="49651"/>
             </a:xfrm>
             <a:prstGeom prst="ellipse">
@@ -7334,7 +7334,7 @@
           </p:nvSpPr>
           <p:spPr>
             <a:xfrm>
-              <a:off x="4563973" y="3611033"/>
+              <a:off x="3566903" y="3304484"/>
               <a:ext cx="49651" cy="49651"/>
             </a:xfrm>
             <a:prstGeom prst="ellipse">
@@ -7369,7 +7369,7 @@
           </p:nvSpPr>
           <p:spPr>
             <a:xfrm>
-              <a:off x="3566903" y="3304484"/>
+              <a:off x="2536241" y="2815520"/>
               <a:ext cx="49651" cy="49651"/>
             </a:xfrm>
             <a:prstGeom prst="ellipse">
@@ -7404,7 +7404,7 @@
           </p:nvSpPr>
           <p:spPr>
             <a:xfrm>
-              <a:off x="2536241" y="2815520"/>
+              <a:off x="2632427" y="2456376"/>
               <a:ext cx="49651" cy="49651"/>
             </a:xfrm>
             <a:prstGeom prst="ellipse">
@@ -7439,7 +7439,7 @@
           </p:nvSpPr>
           <p:spPr>
             <a:xfrm>
-              <a:off x="2632427" y="2456376"/>
+              <a:off x="3867590" y="3323390"/>
               <a:ext cx="49651" cy="49651"/>
             </a:xfrm>
             <a:prstGeom prst="ellipse">
@@ -7474,7 +7474,7 @@
           </p:nvSpPr>
           <p:spPr>
             <a:xfrm>
-              <a:off x="3867590" y="3323390"/>
+              <a:off x="4522870" y="4066193"/>
               <a:ext cx="49651" cy="49651"/>
             </a:xfrm>
             <a:prstGeom prst="ellipse">
@@ -7509,7 +7509,7 @@
           </p:nvSpPr>
           <p:spPr>
             <a:xfrm>
-              <a:off x="4522870" y="4066193"/>
+              <a:off x="4132699" y="2941406"/>
               <a:ext cx="49651" cy="49651"/>
             </a:xfrm>
             <a:prstGeom prst="ellipse">
@@ -7544,7 +7544,7 @@
           </p:nvSpPr>
           <p:spPr>
             <a:xfrm>
-              <a:off x="4132699" y="2941406"/>
+              <a:off x="3083847" y="3189776"/>
               <a:ext cx="49651" cy="49651"/>
             </a:xfrm>
             <a:prstGeom prst="ellipse">
@@ -7579,7 +7579,7 @@
           </p:nvSpPr>
           <p:spPr>
             <a:xfrm>
-              <a:off x="3083847" y="3189776"/>
+              <a:off x="2867760" y="3116647"/>
               <a:ext cx="49651" cy="49651"/>
             </a:xfrm>
             <a:prstGeom prst="ellipse">
@@ -7614,7 +7614,7 @@
           </p:nvSpPr>
           <p:spPr>
             <a:xfrm>
-              <a:off x="2867760" y="3116647"/>
+              <a:off x="7047001" y="4179142"/>
               <a:ext cx="49651" cy="49651"/>
             </a:xfrm>
             <a:prstGeom prst="ellipse">
@@ -7649,7 +7649,7 @@
           </p:nvSpPr>
           <p:spPr>
             <a:xfrm>
-              <a:off x="7047001" y="4179142"/>
+              <a:off x="4442914" y="3181787"/>
               <a:ext cx="49651" cy="49651"/>
             </a:xfrm>
             <a:prstGeom prst="ellipse">
@@ -7684,7 +7684,7 @@
           </p:nvSpPr>
           <p:spPr>
             <a:xfrm>
-              <a:off x="4442914" y="3181787"/>
+              <a:off x="3237206" y="2560785"/>
               <a:ext cx="49651" cy="49651"/>
             </a:xfrm>
             <a:prstGeom prst="ellipse">
@@ -7719,7 +7719,7 @@
           </p:nvSpPr>
           <p:spPr>
             <a:xfrm>
-              <a:off x="3237206" y="2560785"/>
+              <a:off x="4135767" y="2347693"/>
               <a:ext cx="49651" cy="49651"/>
             </a:xfrm>
             <a:prstGeom prst="ellipse">
@@ -7754,7 +7754,7 @@
           </p:nvSpPr>
           <p:spPr>
             <a:xfrm>
-              <a:off x="4135767" y="2347693"/>
+              <a:off x="2927766" y="2933790"/>
               <a:ext cx="49651" cy="49651"/>
             </a:xfrm>
             <a:prstGeom prst="ellipse">
@@ -7789,7 +7789,7 @@
           </p:nvSpPr>
           <p:spPr>
             <a:xfrm>
-              <a:off x="2927766" y="2933790"/>
+              <a:off x="3798408" y="2581935"/>
               <a:ext cx="49651" cy="49651"/>
             </a:xfrm>
             <a:prstGeom prst="ellipse">
@@ -7824,7 +7824,7 @@
           </p:nvSpPr>
           <p:spPr>
             <a:xfrm>
-              <a:off x="3798408" y="2581935"/>
+              <a:off x="1744537" y="3120334"/>
               <a:ext cx="49651" cy="49651"/>
             </a:xfrm>
             <a:prstGeom prst="ellipse">
@@ -7859,7 +7859,7 @@
           </p:nvSpPr>
           <p:spPr>
             <a:xfrm>
-              <a:off x="1744537" y="3120334"/>
+              <a:off x="3279239" y="2941456"/>
               <a:ext cx="49651" cy="49651"/>
             </a:xfrm>
             <a:prstGeom prst="ellipse">
@@ -7894,7 +7894,7 @@
           </p:nvSpPr>
           <p:spPr>
             <a:xfrm>
-              <a:off x="3279239" y="2941456"/>
+              <a:off x="3902851" y="2975585"/>
               <a:ext cx="49651" cy="49651"/>
             </a:xfrm>
             <a:prstGeom prst="ellipse">
@@ -7929,7 +7929,7 @@
           </p:nvSpPr>
           <p:spPr>
             <a:xfrm>
-              <a:off x="3902851" y="2975585"/>
+              <a:off x="4119249" y="3416445"/>
               <a:ext cx="49651" cy="49651"/>
             </a:xfrm>
             <a:prstGeom prst="ellipse">
@@ -7964,7 +7964,7 @@
           </p:nvSpPr>
           <p:spPr>
             <a:xfrm>
-              <a:off x="4119249" y="3416445"/>
+              <a:off x="2509316" y="3570614"/>
               <a:ext cx="49651" cy="49651"/>
             </a:xfrm>
             <a:prstGeom prst="ellipse">
@@ -7999,7 +7999,7 @@
           </p:nvSpPr>
           <p:spPr>
             <a:xfrm>
-              <a:off x="2509316" y="3570614"/>
+              <a:off x="5965982" y="3130475"/>
               <a:ext cx="49651" cy="49651"/>
             </a:xfrm>
             <a:prstGeom prst="ellipse">
@@ -8034,7 +8034,7 @@
           </p:nvSpPr>
           <p:spPr>
             <a:xfrm>
-              <a:off x="5965982" y="3130475"/>
+              <a:off x="2911993" y="2170824"/>
               <a:ext cx="49651" cy="49651"/>
             </a:xfrm>
             <a:prstGeom prst="ellipse">
@@ -8069,7 +8069,7 @@
           </p:nvSpPr>
           <p:spPr>
             <a:xfrm>
-              <a:off x="2911993" y="2170824"/>
+              <a:off x="3755597" y="3590707"/>
               <a:ext cx="49651" cy="49651"/>
             </a:xfrm>
             <a:prstGeom prst="ellipse">
@@ -8104,7 +8104,7 @@
           </p:nvSpPr>
           <p:spPr>
             <a:xfrm>
-              <a:off x="3755597" y="3590707"/>
+              <a:off x="4195605" y="3063565"/>
               <a:ext cx="49651" cy="49651"/>
             </a:xfrm>
             <a:prstGeom prst="ellipse">
@@ -8139,7 +8139,7 @@
           </p:nvSpPr>
           <p:spPr>
             <a:xfrm>
-              <a:off x="4195605" y="3063565"/>
+              <a:off x="3110963" y="2558726"/>
               <a:ext cx="49651" cy="49651"/>
             </a:xfrm>
             <a:prstGeom prst="ellipse">
@@ -8174,7 +8174,7 @@
           </p:nvSpPr>
           <p:spPr>
             <a:xfrm>
-              <a:off x="3110963" y="2558726"/>
+              <a:off x="2884706" y="2480870"/>
               <a:ext cx="49651" cy="49651"/>
             </a:xfrm>
             <a:prstGeom prst="ellipse">
@@ -8209,7 +8209,7 @@
           </p:nvSpPr>
           <p:spPr>
             <a:xfrm>
-              <a:off x="2884706" y="2480870"/>
+              <a:off x="4549915" y="3362381"/>
               <a:ext cx="49651" cy="49651"/>
             </a:xfrm>
             <a:prstGeom prst="ellipse">
@@ -8244,7 +8244,7 @@
           </p:nvSpPr>
           <p:spPr>
             <a:xfrm>
-              <a:off x="4549915" y="3362381"/>
+              <a:off x="2270063" y="2475866"/>
               <a:ext cx="49651" cy="49651"/>
             </a:xfrm>
             <a:prstGeom prst="ellipse">
@@ -8279,7 +8279,7 @@
           </p:nvSpPr>
           <p:spPr>
             <a:xfrm>
-              <a:off x="2270063" y="2475866"/>
+              <a:off x="3693083" y="3278255"/>
               <a:ext cx="49651" cy="49651"/>
             </a:xfrm>
             <a:prstGeom prst="ellipse">
@@ -8314,7 +8314,7 @@
           </p:nvSpPr>
           <p:spPr>
             <a:xfrm>
-              <a:off x="3693083" y="3278255"/>
+              <a:off x="2946879" y="2543903"/>
               <a:ext cx="49651" cy="49651"/>
             </a:xfrm>
             <a:prstGeom prst="ellipse">
@@ -8349,7 +8349,7 @@
           </p:nvSpPr>
           <p:spPr>
             <a:xfrm>
-              <a:off x="2946879" y="2543903"/>
+              <a:off x="5872195" y="3448555"/>
               <a:ext cx="49651" cy="49651"/>
             </a:xfrm>
             <a:prstGeom prst="ellipse">
@@ -8384,7 +8384,7 @@
           </p:nvSpPr>
           <p:spPr>
             <a:xfrm>
-              <a:off x="5872195" y="3448555"/>
+              <a:off x="4407552" y="3244318"/>
               <a:ext cx="49651" cy="49651"/>
             </a:xfrm>
             <a:prstGeom prst="ellipse">
@@ -8419,7 +8419,7 @@
           </p:nvSpPr>
           <p:spPr>
             <a:xfrm>
-              <a:off x="4407552" y="3244318"/>
+              <a:off x="3314560" y="2604854"/>
               <a:ext cx="49651" cy="49651"/>
             </a:xfrm>
             <a:prstGeom prst="ellipse">
@@ -8454,7 +8454,7 @@
           </p:nvSpPr>
           <p:spPr>
             <a:xfrm>
-              <a:off x="3314560" y="2604854"/>
+              <a:off x="5479166" y="2961012"/>
               <a:ext cx="49651" cy="49651"/>
             </a:xfrm>
             <a:prstGeom prst="ellipse">
@@ -8489,7 +8489,7 @@
           </p:nvSpPr>
           <p:spPr>
             <a:xfrm>
-              <a:off x="5479166" y="2961012"/>
+              <a:off x="2471195" y="2716743"/>
               <a:ext cx="49651" cy="49651"/>
             </a:xfrm>
             <a:prstGeom prst="ellipse">
@@ -8524,7 +8524,7 @@
           </p:nvSpPr>
           <p:spPr>
             <a:xfrm>
-              <a:off x="2471195" y="2716743"/>
+              <a:off x="3437815" y="2731242"/>
               <a:ext cx="49651" cy="49651"/>
             </a:xfrm>
             <a:prstGeom prst="ellipse">
@@ -8559,7 +8559,7 @@
           </p:nvSpPr>
           <p:spPr>
             <a:xfrm>
-              <a:off x="3437815" y="2731242"/>
+              <a:off x="4073948" y="2360931"/>
               <a:ext cx="49651" cy="49651"/>
             </a:xfrm>
             <a:prstGeom prst="ellipse">
@@ -8594,7 +8594,7 @@
           </p:nvSpPr>
           <p:spPr>
             <a:xfrm>
-              <a:off x="4073948" y="2360931"/>
+              <a:off x="4535239" y="2706051"/>
               <a:ext cx="49651" cy="49651"/>
             </a:xfrm>
             <a:prstGeom prst="ellipse">
@@ -8629,7 +8629,7 @@
           </p:nvSpPr>
           <p:spPr>
             <a:xfrm>
-              <a:off x="4535239" y="2706051"/>
+              <a:off x="4853105" y="3724351"/>
               <a:ext cx="49651" cy="49651"/>
             </a:xfrm>
             <a:prstGeom prst="ellipse">
@@ -8664,7 +8664,7 @@
           </p:nvSpPr>
           <p:spPr>
             <a:xfrm>
-              <a:off x="4853105" y="3724351"/>
+              <a:off x="2880014" y="2174034"/>
               <a:ext cx="49651" cy="49651"/>
             </a:xfrm>
             <a:prstGeom prst="ellipse">
@@ -8699,7 +8699,7 @@
           </p:nvSpPr>
           <p:spPr>
             <a:xfrm>
-              <a:off x="2880014" y="2174034"/>
+              <a:off x="4720208" y="3415336"/>
               <a:ext cx="49651" cy="49651"/>
             </a:xfrm>
             <a:prstGeom prst="ellipse">
@@ -8734,7 +8734,7 @@
           </p:nvSpPr>
           <p:spPr>
             <a:xfrm>
-              <a:off x="4720208" y="3415336"/>
+              <a:off x="4469822" y="2722141"/>
               <a:ext cx="49651" cy="49651"/>
             </a:xfrm>
             <a:prstGeom prst="ellipse">
@@ -8769,7 +8769,7 @@
           </p:nvSpPr>
           <p:spPr>
             <a:xfrm>
-              <a:off x="4469822" y="2722141"/>
+              <a:off x="4052603" y="3077879"/>
               <a:ext cx="49651" cy="49651"/>
             </a:xfrm>
             <a:prstGeom prst="ellipse">
@@ -8804,7 +8804,7 @@
           </p:nvSpPr>
           <p:spPr>
             <a:xfrm>
-              <a:off x="4052603" y="3077879"/>
+              <a:off x="6819558" y="5177120"/>
               <a:ext cx="49651" cy="49651"/>
             </a:xfrm>
             <a:prstGeom prst="ellipse">
@@ -8839,7 +8839,7 @@
           </p:nvSpPr>
           <p:spPr>
             <a:xfrm>
-              <a:off x="6819558" y="5177120"/>
+              <a:off x="4850443" y="2806920"/>
               <a:ext cx="49651" cy="49651"/>
             </a:xfrm>
             <a:prstGeom prst="ellipse">
@@ -8874,7 +8874,7 @@
           </p:nvSpPr>
           <p:spPr>
             <a:xfrm>
-              <a:off x="4850443" y="2806920"/>
+              <a:off x="6764179" y="4009078"/>
               <a:ext cx="49651" cy="49651"/>
             </a:xfrm>
             <a:prstGeom prst="ellipse">
@@ -8909,7 +8909,7 @@
           </p:nvSpPr>
           <p:spPr>
             <a:xfrm>
-              <a:off x="6764179" y="4009078"/>
+              <a:off x="4373625" y="2850041"/>
               <a:ext cx="49651" cy="49651"/>
             </a:xfrm>
             <a:prstGeom prst="ellipse">
@@ -8944,7 +8944,7 @@
           </p:nvSpPr>
           <p:spPr>
             <a:xfrm>
-              <a:off x="4373625" y="2850041"/>
+              <a:off x="4126035" y="2694632"/>
               <a:ext cx="49651" cy="49651"/>
             </a:xfrm>
             <a:prstGeom prst="ellipse">
@@ -8979,7 +8979,7 @@
           </p:nvSpPr>
           <p:spPr>
             <a:xfrm>
-              <a:off x="4126035" y="2694632"/>
+              <a:off x="4974408" y="4693964"/>
               <a:ext cx="49651" cy="49651"/>
             </a:xfrm>
             <a:prstGeom prst="ellipse">
@@ -9014,7 +9014,7 @@
           </p:nvSpPr>
           <p:spPr>
             <a:xfrm>
-              <a:off x="4974408" y="4693964"/>
+              <a:off x="2042242" y="2859926"/>
               <a:ext cx="49651" cy="49651"/>
             </a:xfrm>
             <a:prstGeom prst="ellipse">
@@ -9049,7 +9049,7 @@
           </p:nvSpPr>
           <p:spPr>
             <a:xfrm>
-              <a:off x="2042242" y="2859926"/>
+              <a:off x="3220064" y="2524593"/>
               <a:ext cx="49651" cy="49651"/>
             </a:xfrm>
             <a:prstGeom prst="ellipse">
@@ -9084,7 +9084,7 @@
           </p:nvSpPr>
           <p:spPr>
             <a:xfrm>
-              <a:off x="3220064" y="2524593"/>
+              <a:off x="4525413" y="3101358"/>
               <a:ext cx="49651" cy="49651"/>
             </a:xfrm>
             <a:prstGeom prst="ellipse">
@@ -9119,7 +9119,7 @@
           </p:nvSpPr>
           <p:spPr>
             <a:xfrm>
-              <a:off x="4525413" y="3101358"/>
+              <a:off x="2287680" y="3346702"/>
               <a:ext cx="49651" cy="49651"/>
             </a:xfrm>
             <a:prstGeom prst="ellipse">
@@ -9154,7 +9154,7 @@
           </p:nvSpPr>
           <p:spPr>
             <a:xfrm>
-              <a:off x="2287680" y="3346702"/>
+              <a:off x="2896051" y="2912221"/>
               <a:ext cx="49651" cy="49651"/>
             </a:xfrm>
             <a:prstGeom prst="ellipse">
@@ -9189,7 +9189,7 @@
           </p:nvSpPr>
           <p:spPr>
             <a:xfrm>
-              <a:off x="2896051" y="2912221"/>
+              <a:off x="5634582" y="3860949"/>
               <a:ext cx="49651" cy="49651"/>
             </a:xfrm>
             <a:prstGeom prst="ellipse">
@@ -9224,7 +9224,7 @@
           </p:nvSpPr>
           <p:spPr>
             <a:xfrm>
-              <a:off x="5634582" y="3860949"/>
+              <a:off x="2526307" y="2848103"/>
               <a:ext cx="49651" cy="49651"/>
             </a:xfrm>
             <a:prstGeom prst="ellipse">
@@ -9259,7 +9259,7 @@
           </p:nvSpPr>
           <p:spPr>
             <a:xfrm>
-              <a:off x="2526307" y="2848103"/>
+              <a:off x="3373560" y="3443204"/>
               <a:ext cx="49651" cy="49651"/>
             </a:xfrm>
             <a:prstGeom prst="ellipse">
@@ -9294,7 +9294,7 @@
           </p:nvSpPr>
           <p:spPr>
             <a:xfrm>
-              <a:off x="3373560" y="3443204"/>
+              <a:off x="3707972" y="3041965"/>
               <a:ext cx="49651" cy="49651"/>
             </a:xfrm>
             <a:prstGeom prst="ellipse">
@@ -9329,7 +9329,7 @@
           </p:nvSpPr>
           <p:spPr>
             <a:xfrm>
-              <a:off x="3707972" y="3041965"/>
+              <a:off x="3221311" y="3418459"/>
               <a:ext cx="49651" cy="49651"/>
             </a:xfrm>
             <a:prstGeom prst="ellipse">
@@ -9364,7 +9364,7 @@
           </p:nvSpPr>
           <p:spPr>
             <a:xfrm>
-              <a:off x="3221311" y="3418459"/>
+              <a:off x="3824164" y="3100711"/>
               <a:ext cx="49651" cy="49651"/>
             </a:xfrm>
             <a:prstGeom prst="ellipse">
@@ -9399,7 +9399,7 @@
           </p:nvSpPr>
           <p:spPr>
             <a:xfrm>
-              <a:off x="3824164" y="3100711"/>
+              <a:off x="4281217" y="3144322"/>
               <a:ext cx="49651" cy="49651"/>
             </a:xfrm>
             <a:prstGeom prst="ellipse">
@@ -9434,7 +9434,7 @@
           </p:nvSpPr>
           <p:spPr>
             <a:xfrm>
-              <a:off x="4281217" y="3144322"/>
+              <a:off x="4958446" y="3788593"/>
               <a:ext cx="49651" cy="49651"/>
             </a:xfrm>
             <a:prstGeom prst="ellipse">
@@ -9469,7 +9469,7 @@
           </p:nvSpPr>
           <p:spPr>
             <a:xfrm>
-              <a:off x="4958446" y="3788593"/>
+              <a:off x="4221117" y="3173528"/>
               <a:ext cx="49651" cy="49651"/>
             </a:xfrm>
             <a:prstGeom prst="ellipse">
@@ -9504,7 +9504,7 @@
           </p:nvSpPr>
           <p:spPr>
             <a:xfrm>
-              <a:off x="4221117" y="3173528"/>
+              <a:off x="3225432" y="2566718"/>
               <a:ext cx="49651" cy="49651"/>
             </a:xfrm>
             <a:prstGeom prst="ellipse">
@@ -9539,7 +9539,7 @@
           </p:nvSpPr>
           <p:spPr>
             <a:xfrm>
-              <a:off x="3225432" y="2566718"/>
+              <a:off x="3498456" y="3256009"/>
               <a:ext cx="49651" cy="49651"/>
             </a:xfrm>
             <a:prstGeom prst="ellipse">
@@ -9574,7 +9574,7 @@
           </p:nvSpPr>
           <p:spPr>
             <a:xfrm>
-              <a:off x="3498456" y="3256009"/>
+              <a:off x="5442799" y="3184778"/>
               <a:ext cx="49651" cy="49651"/>
             </a:xfrm>
             <a:prstGeom prst="ellipse">
@@ -9609,7 +9609,7 @@
           </p:nvSpPr>
           <p:spPr>
             <a:xfrm>
-              <a:off x="5442799" y="3184778"/>
+              <a:off x="4261958" y="3834959"/>
               <a:ext cx="49651" cy="49651"/>
             </a:xfrm>
             <a:prstGeom prst="ellipse">
@@ -9644,7 +9644,7 @@
           </p:nvSpPr>
           <p:spPr>
             <a:xfrm>
-              <a:off x="4261958" y="3834959"/>
+              <a:off x="4472828" y="2974216"/>
               <a:ext cx="49651" cy="49651"/>
             </a:xfrm>
             <a:prstGeom prst="ellipse">
@@ -9679,7 +9679,7 @@
           </p:nvSpPr>
           <p:spPr>
             <a:xfrm>
-              <a:off x="4472828" y="2974216"/>
+              <a:off x="2741332" y="3292903"/>
               <a:ext cx="49651" cy="49651"/>
             </a:xfrm>
             <a:prstGeom prst="ellipse">
@@ -9714,7 +9714,7 @@
           </p:nvSpPr>
           <p:spPr>
             <a:xfrm>
-              <a:off x="2741332" y="3292903"/>
+              <a:off x="3888457" y="3038192"/>
               <a:ext cx="49651" cy="49651"/>
             </a:xfrm>
             <a:prstGeom prst="ellipse">
@@ -9749,7 +9749,7 @@
           </p:nvSpPr>
           <p:spPr>
             <a:xfrm>
-              <a:off x="3888457" y="3038192"/>
+              <a:off x="1764609" y="2588201"/>
               <a:ext cx="49651" cy="49651"/>
             </a:xfrm>
             <a:prstGeom prst="ellipse">
@@ -9784,7 +9784,7 @@
           </p:nvSpPr>
           <p:spPr>
             <a:xfrm>
-              <a:off x="1764609" y="2588201"/>
+              <a:off x="2843696" y="2569895"/>
               <a:ext cx="49651" cy="49651"/>
             </a:xfrm>
             <a:prstGeom prst="ellipse">
@@ -9819,7 +9819,7 @@
           </p:nvSpPr>
           <p:spPr>
             <a:xfrm>
-              <a:off x="2843696" y="2569895"/>
+              <a:off x="2481970" y="3204246"/>
               <a:ext cx="49651" cy="49651"/>
             </a:xfrm>
             <a:prstGeom prst="ellipse">
@@ -9854,7 +9854,7 @@
           </p:nvSpPr>
           <p:spPr>
             <a:xfrm>
-              <a:off x="2481970" y="3204246"/>
+              <a:off x="3527563" y="2471245"/>
               <a:ext cx="49651" cy="49651"/>
             </a:xfrm>
             <a:prstGeom prst="ellipse">
@@ -9889,7 +9889,7 @@
           </p:nvSpPr>
           <p:spPr>
             <a:xfrm>
-              <a:off x="3527563" y="2471245"/>
+              <a:off x="2436033" y="3127013"/>
               <a:ext cx="49651" cy="49651"/>
             </a:xfrm>
             <a:prstGeom prst="ellipse">
@@ -9924,7 +9924,7 @@
           </p:nvSpPr>
           <p:spPr>
             <a:xfrm>
-              <a:off x="2436033" y="3127013"/>
+              <a:off x="4132552" y="3435664"/>
               <a:ext cx="49651" cy="49651"/>
             </a:xfrm>
             <a:prstGeom prst="ellipse">
@@ -9959,7 +9959,7 @@
           </p:nvSpPr>
           <p:spPr>
             <a:xfrm>
-              <a:off x="4132552" y="3435664"/>
+              <a:off x="4331310" y="3078037"/>
               <a:ext cx="49651" cy="49651"/>
             </a:xfrm>
             <a:prstGeom prst="ellipse">
@@ -9994,7 +9994,7 @@
           </p:nvSpPr>
           <p:spPr>
             <a:xfrm>
-              <a:off x="4331310" y="3078037"/>
+              <a:off x="4359180" y="3083129"/>
               <a:ext cx="49651" cy="49651"/>
             </a:xfrm>
             <a:prstGeom prst="ellipse">
@@ -10029,7 +10029,7 @@
           </p:nvSpPr>
           <p:spPr>
             <a:xfrm>
-              <a:off x="4359180" y="3083129"/>
+              <a:off x="3015530" y="2741886"/>
               <a:ext cx="49651" cy="49651"/>
             </a:xfrm>
             <a:prstGeom prst="ellipse">
@@ -10064,7 +10064,7 @@
           </p:nvSpPr>
           <p:spPr>
             <a:xfrm>
-              <a:off x="3015530" y="2741886"/>
+              <a:off x="3512552" y="2979185"/>
               <a:ext cx="49651" cy="49651"/>
             </a:xfrm>
             <a:prstGeom prst="ellipse">
@@ -10099,7 +10099,7 @@
           </p:nvSpPr>
           <p:spPr>
             <a:xfrm>
-              <a:off x="3512552" y="2979185"/>
+              <a:off x="2557148" y="2615786"/>
               <a:ext cx="49651" cy="49651"/>
             </a:xfrm>
             <a:prstGeom prst="ellipse">
@@ -10134,7 +10134,7 @@
           </p:nvSpPr>
           <p:spPr>
             <a:xfrm>
-              <a:off x="2557148" y="2615786"/>
+              <a:off x="4683837" y="2836882"/>
               <a:ext cx="49651" cy="49651"/>
             </a:xfrm>
             <a:prstGeom prst="ellipse">
@@ -10169,7 +10169,7 @@
           </p:nvSpPr>
           <p:spPr>
             <a:xfrm>
-              <a:off x="4683837" y="2836882"/>
+              <a:off x="4639267" y="2947644"/>
               <a:ext cx="49651" cy="49651"/>
             </a:xfrm>
             <a:prstGeom prst="ellipse">
@@ -10204,7 +10204,7 @@
           </p:nvSpPr>
           <p:spPr>
             <a:xfrm>
-              <a:off x="4639267" y="2947644"/>
+              <a:off x="3614087" y="3317698"/>
               <a:ext cx="49651" cy="49651"/>
             </a:xfrm>
             <a:prstGeom prst="ellipse">
@@ -10239,7 +10239,7 @@
           </p:nvSpPr>
           <p:spPr>
             <a:xfrm>
-              <a:off x="3614087" y="3317698"/>
+              <a:off x="3282736" y="3321919"/>
               <a:ext cx="49651" cy="49651"/>
             </a:xfrm>
             <a:prstGeom prst="ellipse">
@@ -10274,7 +10274,7 @@
           </p:nvSpPr>
           <p:spPr>
             <a:xfrm>
-              <a:off x="3282736" y="3321919"/>
+              <a:off x="5129993" y="3295368"/>
               <a:ext cx="49651" cy="49651"/>
             </a:xfrm>
             <a:prstGeom prst="ellipse">
@@ -10309,7 +10309,7 @@
           </p:nvSpPr>
           <p:spPr>
             <a:xfrm>
-              <a:off x="5129993" y="3295368"/>
+              <a:off x="3694206" y="2699960"/>
               <a:ext cx="49651" cy="49651"/>
             </a:xfrm>
             <a:prstGeom prst="ellipse">
@@ -10344,7 +10344,7 @@
           </p:nvSpPr>
           <p:spPr>
             <a:xfrm>
-              <a:off x="3694206" y="2699960"/>
+              <a:off x="6153105" y="3488504"/>
               <a:ext cx="49651" cy="49651"/>
             </a:xfrm>
             <a:prstGeom prst="ellipse">
@@ -10379,7 +10379,7 @@
           </p:nvSpPr>
           <p:spPr>
             <a:xfrm>
-              <a:off x="6153105" y="3488504"/>
+              <a:off x="6051802" y="3401767"/>
               <a:ext cx="49651" cy="49651"/>
             </a:xfrm>
             <a:prstGeom prst="ellipse">
@@ -10414,7 +10414,7 @@
           </p:nvSpPr>
           <p:spPr>
             <a:xfrm>
-              <a:off x="6051802" y="3401767"/>
+              <a:off x="4818655" y="3277344"/>
               <a:ext cx="49651" cy="49651"/>
             </a:xfrm>
             <a:prstGeom prst="ellipse">
@@ -10449,7 +10449,7 @@
           </p:nvSpPr>
           <p:spPr>
             <a:xfrm>
-              <a:off x="4818655" y="3277344"/>
+              <a:off x="3222018" y="2680512"/>
               <a:ext cx="49651" cy="49651"/>
             </a:xfrm>
             <a:prstGeom prst="ellipse">
@@ -10484,7 +10484,7 @@
           </p:nvSpPr>
           <p:spPr>
             <a:xfrm>
-              <a:off x="3222018" y="2680512"/>
+              <a:off x="6278391" y="4453970"/>
               <a:ext cx="49651" cy="49651"/>
             </a:xfrm>
             <a:prstGeom prst="ellipse">
@@ -10519,7 +10519,7 @@
           </p:nvSpPr>
           <p:spPr>
             <a:xfrm>
-              <a:off x="6278391" y="4453970"/>
+              <a:off x="4030767" y="3013048"/>
               <a:ext cx="49651" cy="49651"/>
             </a:xfrm>
             <a:prstGeom prst="ellipse">
@@ -10554,7 +10554,7 @@
           </p:nvSpPr>
           <p:spPr>
             <a:xfrm>
-              <a:off x="4030767" y="3013048"/>
+              <a:off x="4279434" y="3066222"/>
               <a:ext cx="49651" cy="49651"/>
             </a:xfrm>
             <a:prstGeom prst="ellipse">
@@ -10589,7 +10589,7 @@
           </p:nvSpPr>
           <p:spPr>
             <a:xfrm>
-              <a:off x="4279434" y="3066222"/>
+              <a:off x="5121414" y="3286811"/>
               <a:ext cx="49651" cy="49651"/>
             </a:xfrm>
             <a:prstGeom prst="ellipse">
@@ -10624,7 +10624,7 @@
           </p:nvSpPr>
           <p:spPr>
             <a:xfrm>
-              <a:off x="5121414" y="3286811"/>
+              <a:off x="4238380" y="3103343"/>
               <a:ext cx="49651" cy="49651"/>
             </a:xfrm>
             <a:prstGeom prst="ellipse">
@@ -10659,7 +10659,7 @@
           </p:nvSpPr>
           <p:spPr>
             <a:xfrm>
-              <a:off x="4238380" y="3103343"/>
+              <a:off x="4835942" y="3614193"/>
               <a:ext cx="49651" cy="49651"/>
             </a:xfrm>
             <a:prstGeom prst="ellipse">
@@ -10694,7 +10694,7 @@
           </p:nvSpPr>
           <p:spPr>
             <a:xfrm>
-              <a:off x="4835942" y="3614193"/>
+              <a:off x="3779013" y="2289701"/>
               <a:ext cx="49651" cy="49651"/>
             </a:xfrm>
             <a:prstGeom prst="ellipse">
@@ -10729,7 +10729,7 @@
           </p:nvSpPr>
           <p:spPr>
             <a:xfrm>
-              <a:off x="3779013" y="2289701"/>
+              <a:off x="5657419" y="4193890"/>
               <a:ext cx="49651" cy="49651"/>
             </a:xfrm>
             <a:prstGeom prst="ellipse">
@@ -10764,7 +10764,7 @@
           </p:nvSpPr>
           <p:spPr>
             <a:xfrm>
-              <a:off x="5657419" y="4193890"/>
+              <a:off x="3138605" y="2374434"/>
               <a:ext cx="49651" cy="49651"/>
             </a:xfrm>
             <a:prstGeom prst="ellipse">
@@ -10799,7 +10799,7 @@
           </p:nvSpPr>
           <p:spPr>
             <a:xfrm>
-              <a:off x="3138605" y="2374434"/>
+              <a:off x="3302179" y="2387461"/>
               <a:ext cx="49651" cy="49651"/>
             </a:xfrm>
             <a:prstGeom prst="ellipse">
@@ -10834,7 +10834,7 @@
           </p:nvSpPr>
           <p:spPr>
             <a:xfrm>
-              <a:off x="3302179" y="2387461"/>
+              <a:off x="3803035" y="2967472"/>
               <a:ext cx="49651" cy="49651"/>
             </a:xfrm>
             <a:prstGeom prst="ellipse">
@@ -10869,7 +10869,7 @@
           </p:nvSpPr>
           <p:spPr>
             <a:xfrm>
-              <a:off x="3803035" y="2967472"/>
+              <a:off x="4340070" y="3082447"/>
               <a:ext cx="49651" cy="49651"/>
             </a:xfrm>
             <a:prstGeom prst="ellipse">
@@ -10904,7 +10904,7 @@
           </p:nvSpPr>
           <p:spPr>
             <a:xfrm>
-              <a:off x="4340070" y="3082447"/>
+              <a:off x="3767401" y="3209978"/>
               <a:ext cx="49651" cy="49651"/>
             </a:xfrm>
             <a:prstGeom prst="ellipse">
@@ -10939,7 +10939,7 @@
           </p:nvSpPr>
           <p:spPr>
             <a:xfrm>
-              <a:off x="3767401" y="3209978"/>
+              <a:off x="4562764" y="3657460"/>
               <a:ext cx="49651" cy="49651"/>
             </a:xfrm>
             <a:prstGeom prst="ellipse">
@@ -10974,7 +10974,7 @@
           </p:nvSpPr>
           <p:spPr>
             <a:xfrm>
-              <a:off x="4562764" y="3657460"/>
+              <a:off x="2515771" y="3036029"/>
               <a:ext cx="49651" cy="49651"/>
             </a:xfrm>
             <a:prstGeom prst="ellipse">
@@ -11009,7 +11009,7 @@
           </p:nvSpPr>
           <p:spPr>
             <a:xfrm>
-              <a:off x="2515771" y="3036029"/>
+              <a:off x="3147989" y="2662654"/>
               <a:ext cx="49651" cy="49651"/>
             </a:xfrm>
             <a:prstGeom prst="ellipse">
@@ -11044,7 +11044,7 @@
           </p:nvSpPr>
           <p:spPr>
             <a:xfrm>
-              <a:off x="3147989" y="2662654"/>
+              <a:off x="5079338" y="3912265"/>
               <a:ext cx="49651" cy="49651"/>
             </a:xfrm>
             <a:prstGeom prst="ellipse">
@@ -11079,7 +11079,7 @@
           </p:nvSpPr>
           <p:spPr>
             <a:xfrm>
-              <a:off x="5079338" y="3912265"/>
+              <a:off x="4713235" y="4032544"/>
               <a:ext cx="49651" cy="49651"/>
             </a:xfrm>
             <a:prstGeom prst="ellipse">
@@ -11114,7 +11114,7 @@
           </p:nvSpPr>
           <p:spPr>
             <a:xfrm>
-              <a:off x="4713235" y="4032544"/>
+              <a:off x="2365145" y="3030985"/>
               <a:ext cx="49651" cy="49651"/>
             </a:xfrm>
             <a:prstGeom prst="ellipse">
@@ -11149,7 +11149,7 @@
           </p:nvSpPr>
           <p:spPr>
             <a:xfrm>
-              <a:off x="2365145" y="3030985"/>
+              <a:off x="2783852" y="2767328"/>
               <a:ext cx="49651" cy="49651"/>
             </a:xfrm>
             <a:prstGeom prst="ellipse">
@@ -11184,7 +11184,7 @@
           </p:nvSpPr>
           <p:spPr>
             <a:xfrm>
-              <a:off x="2783852" y="2767328"/>
+              <a:off x="4450061" y="2877763"/>
               <a:ext cx="49651" cy="49651"/>
             </a:xfrm>
             <a:prstGeom prst="ellipse">
@@ -11219,7 +11219,7 @@
           </p:nvSpPr>
           <p:spPr>
             <a:xfrm>
-              <a:off x="4450061" y="2877763"/>
+              <a:off x="2761856" y="2955096"/>
               <a:ext cx="49651" cy="49651"/>
             </a:xfrm>
             <a:prstGeom prst="ellipse">
@@ -11254,7 +11254,7 @@
           </p:nvSpPr>
           <p:spPr>
             <a:xfrm>
-              <a:off x="2761856" y="2955096"/>
+              <a:off x="5881992" y="2834223"/>
               <a:ext cx="49651" cy="49651"/>
             </a:xfrm>
             <a:prstGeom prst="ellipse">
@@ -11289,7 +11289,7 @@
           </p:nvSpPr>
           <p:spPr>
             <a:xfrm>
-              <a:off x="5881992" y="2834223"/>
+              <a:off x="5179269" y="4028686"/>
               <a:ext cx="49651" cy="49651"/>
             </a:xfrm>
             <a:prstGeom prst="ellipse">
@@ -11324,7 +11324,7 @@
           </p:nvSpPr>
           <p:spPr>
             <a:xfrm>
-              <a:off x="5179269" y="4028686"/>
+              <a:off x="5490625" y="3625050"/>
               <a:ext cx="49651" cy="49651"/>
             </a:xfrm>
             <a:prstGeom prst="ellipse">
@@ -11359,7 +11359,7 @@
           </p:nvSpPr>
           <p:spPr>
             <a:xfrm>
-              <a:off x="5490625" y="3625050"/>
+              <a:off x="3761783" y="2573557"/>
               <a:ext cx="49651" cy="49651"/>
             </a:xfrm>
             <a:prstGeom prst="ellipse">
@@ -11394,7 +11394,7 @@
           </p:nvSpPr>
           <p:spPr>
             <a:xfrm>
-              <a:off x="3761783" y="2573557"/>
+              <a:off x="5334625" y="4331797"/>
               <a:ext cx="49651" cy="49651"/>
             </a:xfrm>
             <a:prstGeom prst="ellipse">
@@ -11429,7 +11429,7 @@
           </p:nvSpPr>
           <p:spPr>
             <a:xfrm>
-              <a:off x="5334625" y="4331797"/>
+              <a:off x="5407059" y="3262726"/>
               <a:ext cx="49651" cy="49651"/>
             </a:xfrm>
             <a:prstGeom prst="ellipse">
@@ -11464,7 +11464,7 @@
           </p:nvSpPr>
           <p:spPr>
             <a:xfrm>
-              <a:off x="5407059" y="3262726"/>
+              <a:off x="7406432" y="5524381"/>
               <a:ext cx="49651" cy="49651"/>
             </a:xfrm>
             <a:prstGeom prst="ellipse">
@@ -11499,7 +11499,7 @@
           </p:nvSpPr>
           <p:spPr>
             <a:xfrm>
-              <a:off x="7406432" y="5524381"/>
+              <a:off x="4219801" y="3458503"/>
               <a:ext cx="49651" cy="49651"/>
             </a:xfrm>
             <a:prstGeom prst="ellipse">
@@ -11534,7 +11534,7 @@
           </p:nvSpPr>
           <p:spPr>
             <a:xfrm>
-              <a:off x="4219801" y="3458503"/>
+              <a:off x="4238563" y="3094723"/>
               <a:ext cx="49651" cy="49651"/>
             </a:xfrm>
             <a:prstGeom prst="ellipse">
@@ -11569,7 +11569,7 @@
           </p:nvSpPr>
           <p:spPr>
             <a:xfrm>
-              <a:off x="4238563" y="3094723"/>
+              <a:off x="2375209" y="2655158"/>
               <a:ext cx="49651" cy="49651"/>
             </a:xfrm>
             <a:prstGeom prst="ellipse">
@@ -11604,7 +11604,7 @@
           </p:nvSpPr>
           <p:spPr>
             <a:xfrm>
-              <a:off x="2375209" y="2655158"/>
+              <a:off x="6043615" y="4008672"/>
               <a:ext cx="49651" cy="49651"/>
             </a:xfrm>
             <a:prstGeom prst="ellipse">
@@ -11639,7 +11639,7 @@
           </p:nvSpPr>
           <p:spPr>
             <a:xfrm>
-              <a:off x="6043615" y="4008672"/>
+              <a:off x="3275201" y="2755142"/>
               <a:ext cx="49651" cy="49651"/>
             </a:xfrm>
             <a:prstGeom prst="ellipse">
@@ -11674,7 +11674,7 @@
           </p:nvSpPr>
           <p:spPr>
             <a:xfrm>
-              <a:off x="3275201" y="2755142"/>
+              <a:off x="3807769" y="3174113"/>
               <a:ext cx="49651" cy="49651"/>
             </a:xfrm>
             <a:prstGeom prst="ellipse">
@@ -11709,7 +11709,7 @@
           </p:nvSpPr>
           <p:spPr>
             <a:xfrm>
-              <a:off x="3807769" y="3174113"/>
+              <a:off x="4910449" y="3619913"/>
               <a:ext cx="49651" cy="49651"/>
             </a:xfrm>
             <a:prstGeom prst="ellipse">
@@ -11744,7 +11744,7 @@
           </p:nvSpPr>
           <p:spPr>
             <a:xfrm>
-              <a:off x="4910449" y="3619913"/>
+              <a:off x="4706277" y="3307953"/>
               <a:ext cx="49651" cy="49651"/>
             </a:xfrm>
             <a:prstGeom prst="ellipse">
@@ -11779,7 +11779,7 @@
           </p:nvSpPr>
           <p:spPr>
             <a:xfrm>
-              <a:off x="4706277" y="3307953"/>
+              <a:off x="4731813" y="2380533"/>
               <a:ext cx="49651" cy="49651"/>
             </a:xfrm>
             <a:prstGeom prst="ellipse">
@@ -11814,7 +11814,7 @@
           </p:nvSpPr>
           <p:spPr>
             <a:xfrm>
-              <a:off x="4731813" y="2380533"/>
+              <a:off x="6443347" y="4059764"/>
               <a:ext cx="49651" cy="49651"/>
             </a:xfrm>
             <a:prstGeom prst="ellipse">
@@ -11849,7 +11849,7 @@
           </p:nvSpPr>
           <p:spPr>
             <a:xfrm>
-              <a:off x="6443347" y="4059764"/>
+              <a:off x="4510335" y="3144999"/>
               <a:ext cx="49651" cy="49651"/>
             </a:xfrm>
             <a:prstGeom prst="ellipse">
@@ -11884,7 +11884,7 @@
           </p:nvSpPr>
           <p:spPr>
             <a:xfrm>
-              <a:off x="4510335" y="3144999"/>
+              <a:off x="2776030" y="2084305"/>
               <a:ext cx="49651" cy="49651"/>
             </a:xfrm>
             <a:prstGeom prst="ellipse">
@@ -11919,7 +11919,7 @@
           </p:nvSpPr>
           <p:spPr>
             <a:xfrm>
-              <a:off x="2776030" y="2084305"/>
+              <a:off x="2598214" y="3537619"/>
               <a:ext cx="49651" cy="49651"/>
             </a:xfrm>
             <a:prstGeom prst="ellipse">
@@ -11954,7 +11954,7 @@
           </p:nvSpPr>
           <p:spPr>
             <a:xfrm>
-              <a:off x="2598214" y="3537619"/>
+              <a:off x="4514778" y="3402522"/>
               <a:ext cx="49651" cy="49651"/>
             </a:xfrm>
             <a:prstGeom prst="ellipse">
@@ -11989,7 +11989,7 @@
           </p:nvSpPr>
           <p:spPr>
             <a:xfrm>
-              <a:off x="4514778" y="3402522"/>
+              <a:off x="4487098" y="2551512"/>
               <a:ext cx="49651" cy="49651"/>
             </a:xfrm>
             <a:prstGeom prst="ellipse">
@@ -12024,7 +12024,7 @@
           </p:nvSpPr>
           <p:spPr>
             <a:xfrm>
-              <a:off x="4487098" y="2551512"/>
+              <a:off x="5018242" y="3922624"/>
               <a:ext cx="49651" cy="49651"/>
             </a:xfrm>
             <a:prstGeom prst="ellipse">
@@ -12059,7 +12059,7 @@
           </p:nvSpPr>
           <p:spPr>
             <a:xfrm>
-              <a:off x="5018242" y="3922624"/>
+              <a:off x="3292505" y="2874433"/>
               <a:ext cx="49651" cy="49651"/>
             </a:xfrm>
             <a:prstGeom prst="ellipse">
@@ -12094,7 +12094,7 @@
           </p:nvSpPr>
           <p:spPr>
             <a:xfrm>
-              <a:off x="3292505" y="2874433"/>
+              <a:off x="3566147" y="3415910"/>
               <a:ext cx="49651" cy="49651"/>
             </a:xfrm>
             <a:prstGeom prst="ellipse">
@@ -12129,7 +12129,7 @@
           </p:nvSpPr>
           <p:spPr>
             <a:xfrm>
-              <a:off x="3566147" y="3415910"/>
+              <a:off x="3523664" y="3040018"/>
               <a:ext cx="49651" cy="49651"/>
             </a:xfrm>
             <a:prstGeom prst="ellipse">
@@ -12164,7 +12164,7 @@
           </p:nvSpPr>
           <p:spPr>
             <a:xfrm>
-              <a:off x="3523664" y="3040018"/>
+              <a:off x="4480728" y="3380269"/>
               <a:ext cx="49651" cy="49651"/>
             </a:xfrm>
             <a:prstGeom prst="ellipse">
@@ -12199,7 +12199,7 @@
           </p:nvSpPr>
           <p:spPr>
             <a:xfrm>
-              <a:off x="4480728" y="3380269"/>
+              <a:off x="4811505" y="2853976"/>
               <a:ext cx="49651" cy="49651"/>
             </a:xfrm>
             <a:prstGeom prst="ellipse">
@@ -12234,7 +12234,7 @@
           </p:nvSpPr>
           <p:spPr>
             <a:xfrm>
-              <a:off x="4811505" y="2853976"/>
+              <a:off x="4035574" y="2905172"/>
               <a:ext cx="49651" cy="49651"/>
             </a:xfrm>
             <a:prstGeom prst="ellipse">
@@ -12269,7 +12269,7 @@
           </p:nvSpPr>
           <p:spPr>
             <a:xfrm>
-              <a:off x="4035574" y="2905172"/>
+              <a:off x="5109127" y="2929515"/>
               <a:ext cx="49651" cy="49651"/>
             </a:xfrm>
             <a:prstGeom prst="ellipse">
@@ -12304,7 +12304,7 @@
           </p:nvSpPr>
           <p:spPr>
             <a:xfrm>
-              <a:off x="5109127" y="2929515"/>
+              <a:off x="3165525" y="2881262"/>
               <a:ext cx="49651" cy="49651"/>
             </a:xfrm>
             <a:prstGeom prst="ellipse">
@@ -12339,7 +12339,7 @@
           </p:nvSpPr>
           <p:spPr>
             <a:xfrm>
-              <a:off x="3165525" y="2881262"/>
+              <a:off x="4179052" y="2819543"/>
               <a:ext cx="49651" cy="49651"/>
             </a:xfrm>
             <a:prstGeom prst="ellipse">
@@ -12374,7 +12374,7 @@
           </p:nvSpPr>
           <p:spPr>
             <a:xfrm>
-              <a:off x="4179052" y="2819543"/>
+              <a:off x="4387211" y="4373104"/>
               <a:ext cx="49651" cy="49651"/>
             </a:xfrm>
             <a:prstGeom prst="ellipse">
@@ -12409,7 +12409,7 @@
           </p:nvSpPr>
           <p:spPr>
             <a:xfrm>
-              <a:off x="4387211" y="4373104"/>
+              <a:off x="3820848" y="3702513"/>
               <a:ext cx="49651" cy="49651"/>
             </a:xfrm>
             <a:prstGeom prst="ellipse">
@@ -12444,7 +12444,7 @@
           </p:nvSpPr>
           <p:spPr>
             <a:xfrm>
-              <a:off x="3820848" y="3702513"/>
+              <a:off x="4464872" y="3214022"/>
               <a:ext cx="49651" cy="49651"/>
             </a:xfrm>
             <a:prstGeom prst="ellipse">
@@ -12479,7 +12479,7 @@
           </p:nvSpPr>
           <p:spPr>
             <a:xfrm>
-              <a:off x="4464872" y="3214022"/>
+              <a:off x="3196409" y="2854984"/>
               <a:ext cx="49651" cy="49651"/>
             </a:xfrm>
             <a:prstGeom prst="ellipse">
@@ -12514,7 +12514,7 @@
           </p:nvSpPr>
           <p:spPr>
             <a:xfrm>
-              <a:off x="3196409" y="2854984"/>
+              <a:off x="2350459" y="2790286"/>
               <a:ext cx="49651" cy="49651"/>
             </a:xfrm>
             <a:prstGeom prst="ellipse">
@@ -12549,7 +12549,7 @@
           </p:nvSpPr>
           <p:spPr>
             <a:xfrm>
-              <a:off x="2350459" y="2790286"/>
+              <a:off x="3101255" y="2723131"/>
               <a:ext cx="49651" cy="49651"/>
             </a:xfrm>
             <a:prstGeom prst="ellipse">
@@ -12584,7 +12584,7 @@
           </p:nvSpPr>
           <p:spPr>
             <a:xfrm>
-              <a:off x="3101255" y="2723131"/>
+              <a:off x="3877035" y="2727851"/>
               <a:ext cx="49651" cy="49651"/>
             </a:xfrm>
             <a:prstGeom prst="ellipse">
@@ -12619,7 +12619,7 @@
           </p:nvSpPr>
           <p:spPr>
             <a:xfrm>
-              <a:off x="3877035" y="2727851"/>
+              <a:off x="3487242" y="2696217"/>
               <a:ext cx="49651" cy="49651"/>
             </a:xfrm>
             <a:prstGeom prst="ellipse">
@@ -12654,7 +12654,7 @@
           </p:nvSpPr>
           <p:spPr>
             <a:xfrm>
-              <a:off x="3487242" y="2696217"/>
+              <a:off x="2682927" y="2332156"/>
               <a:ext cx="49651" cy="49651"/>
             </a:xfrm>
             <a:prstGeom prst="ellipse">
@@ -12689,7 +12689,7 @@
           </p:nvSpPr>
           <p:spPr>
             <a:xfrm>
-              <a:off x="2682927" y="2332156"/>
+              <a:off x="3664091" y="3557589"/>
               <a:ext cx="49651" cy="49651"/>
             </a:xfrm>
             <a:prstGeom prst="ellipse">
@@ -12724,7 +12724,7 @@
           </p:nvSpPr>
           <p:spPr>
             <a:xfrm>
-              <a:off x="3664091" y="3557589"/>
+              <a:off x="8242371" y="4772225"/>
               <a:ext cx="49651" cy="49651"/>
             </a:xfrm>
             <a:prstGeom prst="ellipse">
@@ -12759,7 +12759,7 @@
           </p:nvSpPr>
           <p:spPr>
             <a:xfrm>
-              <a:off x="8242371" y="4772225"/>
+              <a:off x="2612574" y="3755827"/>
               <a:ext cx="49651" cy="49651"/>
             </a:xfrm>
             <a:prstGeom prst="ellipse">
@@ -12794,7 +12794,7 @@
           </p:nvSpPr>
           <p:spPr>
             <a:xfrm>
-              <a:off x="2612574" y="3755827"/>
+              <a:off x="3599389" y="2752689"/>
               <a:ext cx="49651" cy="49651"/>
             </a:xfrm>
             <a:prstGeom prst="ellipse">
@@ -12829,7 +12829,7 @@
           </p:nvSpPr>
           <p:spPr>
             <a:xfrm>
-              <a:off x="3599389" y="2752689"/>
+              <a:off x="6441259" y="3724335"/>
               <a:ext cx="49651" cy="49651"/>
             </a:xfrm>
             <a:prstGeom prst="ellipse">
@@ -12864,7 +12864,7 @@
           </p:nvSpPr>
           <p:spPr>
             <a:xfrm>
-              <a:off x="6441259" y="3724335"/>
+              <a:off x="1242100" y="3123255"/>
               <a:ext cx="49651" cy="49651"/>
             </a:xfrm>
             <a:prstGeom prst="ellipse">
@@ -12899,7 +12899,7 @@
           </p:nvSpPr>
           <p:spPr>
             <a:xfrm>
-              <a:off x="1242100" y="3123255"/>
+              <a:off x="3360513" y="2989068"/>
               <a:ext cx="49651" cy="49651"/>
             </a:xfrm>
             <a:prstGeom prst="ellipse">
@@ -12934,7 +12934,7 @@
           </p:nvSpPr>
           <p:spPr>
             <a:xfrm>
-              <a:off x="3360513" y="2989068"/>
+              <a:off x="5091158" y="3564746"/>
               <a:ext cx="49651" cy="49651"/>
             </a:xfrm>
             <a:prstGeom prst="ellipse">
@@ -12969,7 +12969,7 @@
           </p:nvSpPr>
           <p:spPr>
             <a:xfrm>
-              <a:off x="5091158" y="3564746"/>
+              <a:off x="2807219" y="2818155"/>
               <a:ext cx="49651" cy="49651"/>
             </a:xfrm>
             <a:prstGeom prst="ellipse">
@@ -13004,7 +13004,7 @@
           </p:nvSpPr>
           <p:spPr>
             <a:xfrm>
-              <a:off x="2807219" y="2818155"/>
+              <a:off x="2655187" y="2732088"/>
               <a:ext cx="49651" cy="49651"/>
             </a:xfrm>
             <a:prstGeom prst="ellipse">
@@ -13039,7 +13039,7 @@
           </p:nvSpPr>
           <p:spPr>
             <a:xfrm>
-              <a:off x="2655187" y="2732088"/>
+              <a:off x="3697899" y="2376060"/>
               <a:ext cx="49651" cy="49651"/>
             </a:xfrm>
             <a:prstGeom prst="ellipse">
@@ -13074,7 +13074,7 @@
           </p:nvSpPr>
           <p:spPr>
             <a:xfrm>
-              <a:off x="3697899" y="2376060"/>
+              <a:off x="5728809" y="3902559"/>
               <a:ext cx="49651" cy="49651"/>
             </a:xfrm>
             <a:prstGeom prst="ellipse">
@@ -13109,7 +13109,7 @@
           </p:nvSpPr>
           <p:spPr>
             <a:xfrm>
-              <a:off x="5728809" y="3902559"/>
+              <a:off x="6850073" y="3800285"/>
               <a:ext cx="49651" cy="49651"/>
             </a:xfrm>
             <a:prstGeom prst="ellipse">
@@ -13144,7 +13144,7 @@
           </p:nvSpPr>
           <p:spPr>
             <a:xfrm>
-              <a:off x="6850073" y="3800285"/>
+              <a:off x="3770352" y="2951171"/>
               <a:ext cx="49651" cy="49651"/>
             </a:xfrm>
             <a:prstGeom prst="ellipse">
@@ -13179,7 +13179,7 @@
           </p:nvSpPr>
           <p:spPr>
             <a:xfrm>
-              <a:off x="3770352" y="2951171"/>
+              <a:off x="4681203" y="2603854"/>
               <a:ext cx="49651" cy="49651"/>
             </a:xfrm>
             <a:prstGeom prst="ellipse">
@@ -13214,7 +13214,7 @@
           </p:nvSpPr>
           <p:spPr>
             <a:xfrm>
-              <a:off x="4681203" y="2603854"/>
+              <a:off x="7113378" y="3855475"/>
               <a:ext cx="49651" cy="49651"/>
             </a:xfrm>
             <a:prstGeom prst="ellipse">
@@ -13249,7 +13249,7 @@
           </p:nvSpPr>
           <p:spPr>
             <a:xfrm>
-              <a:off x="7113378" y="3855475"/>
+              <a:off x="2703964" y="2649642"/>
               <a:ext cx="49651" cy="49651"/>
             </a:xfrm>
             <a:prstGeom prst="ellipse">
@@ -13284,7 +13284,7 @@
           </p:nvSpPr>
           <p:spPr>
             <a:xfrm>
-              <a:off x="2703964" y="2649642"/>
+              <a:off x="6151197" y="3789523"/>
               <a:ext cx="49651" cy="49651"/>
             </a:xfrm>
             <a:prstGeom prst="ellipse">
@@ -13319,7 +13319,7 @@
           </p:nvSpPr>
           <p:spPr>
             <a:xfrm>
-              <a:off x="6151197" y="3789523"/>
+              <a:off x="2952648" y="3117518"/>
               <a:ext cx="49651" cy="49651"/>
             </a:xfrm>
             <a:prstGeom prst="ellipse">
@@ -13354,7 +13354,7 @@
           </p:nvSpPr>
           <p:spPr>
             <a:xfrm>
-              <a:off x="2952648" y="3117518"/>
+              <a:off x="3889197" y="3299366"/>
               <a:ext cx="49651" cy="49651"/>
             </a:xfrm>
             <a:prstGeom prst="ellipse">
@@ -13389,7 +13389,7 @@
           </p:nvSpPr>
           <p:spPr>
             <a:xfrm>
-              <a:off x="3889197" y="3299366"/>
+              <a:off x="3044159" y="2247124"/>
               <a:ext cx="49651" cy="49651"/>
             </a:xfrm>
             <a:prstGeom prst="ellipse">
@@ -13424,7 +13424,7 @@
           </p:nvSpPr>
           <p:spPr>
             <a:xfrm>
-              <a:off x="3044159" y="2247124"/>
+              <a:off x="3929632" y="2612995"/>
               <a:ext cx="49651" cy="49651"/>
             </a:xfrm>
             <a:prstGeom prst="ellipse">
@@ -13459,7 +13459,7 @@
           </p:nvSpPr>
           <p:spPr>
             <a:xfrm>
-              <a:off x="3929632" y="2612995"/>
+              <a:off x="4193874" y="2895623"/>
               <a:ext cx="49651" cy="49651"/>
             </a:xfrm>
             <a:prstGeom prst="ellipse">
@@ -13494,7 +13494,7 @@
           </p:nvSpPr>
           <p:spPr>
             <a:xfrm>
-              <a:off x="4193874" y="2895623"/>
+              <a:off x="2891158" y="2593114"/>
               <a:ext cx="49651" cy="49651"/>
             </a:xfrm>
             <a:prstGeom prst="ellipse">
@@ -13529,7 +13529,7 @@
           </p:nvSpPr>
           <p:spPr>
             <a:xfrm>
-              <a:off x="2891158" y="2593114"/>
+              <a:off x="3056984" y="2712974"/>
               <a:ext cx="49651" cy="49651"/>
             </a:xfrm>
             <a:prstGeom prst="ellipse">
@@ -13564,7 +13564,7 @@
           </p:nvSpPr>
           <p:spPr>
             <a:xfrm>
-              <a:off x="3056984" y="2712974"/>
+              <a:off x="3489453" y="3038492"/>
               <a:ext cx="49651" cy="49651"/>
             </a:xfrm>
             <a:prstGeom prst="ellipse">
@@ -13599,7 +13599,7 @@
           </p:nvSpPr>
           <p:spPr>
             <a:xfrm>
-              <a:off x="3489453" y="3038492"/>
+              <a:off x="4355508" y="2824841"/>
               <a:ext cx="49651" cy="49651"/>
             </a:xfrm>
             <a:prstGeom prst="ellipse">
@@ -13634,7 +13634,7 @@
           </p:nvSpPr>
           <p:spPr>
             <a:xfrm>
-              <a:off x="4355508" y="2824841"/>
+              <a:off x="6228926" y="3600615"/>
               <a:ext cx="49651" cy="49651"/>
             </a:xfrm>
             <a:prstGeom prst="ellipse">
@@ -13669,7 +13669,7 @@
           </p:nvSpPr>
           <p:spPr>
             <a:xfrm>
-              <a:off x="6228926" y="3600615"/>
+              <a:off x="2738635" y="2555068"/>
               <a:ext cx="49651" cy="49651"/>
             </a:xfrm>
             <a:prstGeom prst="ellipse">
@@ -13704,7 +13704,7 @@
           </p:nvSpPr>
           <p:spPr>
             <a:xfrm>
-              <a:off x="2738635" y="2555068"/>
+              <a:off x="3725437" y="2579515"/>
               <a:ext cx="49651" cy="49651"/>
             </a:xfrm>
             <a:prstGeom prst="ellipse">
@@ -13739,7 +13739,7 @@
           </p:nvSpPr>
           <p:spPr>
             <a:xfrm>
-              <a:off x="3725437" y="2579515"/>
+              <a:off x="4495184" y="2660253"/>
               <a:ext cx="49651" cy="49651"/>
             </a:xfrm>
             <a:prstGeom prst="ellipse">
@@ -13774,7 +13774,7 @@
           </p:nvSpPr>
           <p:spPr>
             <a:xfrm>
-              <a:off x="4495184" y="2660253"/>
+              <a:off x="3696569" y="2305716"/>
               <a:ext cx="49651" cy="49651"/>
             </a:xfrm>
             <a:prstGeom prst="ellipse">
@@ -13809,7 +13809,7 @@
           </p:nvSpPr>
           <p:spPr>
             <a:xfrm>
-              <a:off x="3696569" y="2305716"/>
+              <a:off x="6450682" y="3559952"/>
               <a:ext cx="49651" cy="49651"/>
             </a:xfrm>
             <a:prstGeom prst="ellipse">
@@ -13844,7 +13844,7 @@
           </p:nvSpPr>
           <p:spPr>
             <a:xfrm>
-              <a:off x="6450682" y="3559952"/>
+              <a:off x="5719352" y="3069635"/>
               <a:ext cx="49651" cy="49651"/>
             </a:xfrm>
             <a:prstGeom prst="ellipse">
@@ -13879,7 +13879,7 @@
           </p:nvSpPr>
           <p:spPr>
             <a:xfrm>
-              <a:off x="5719352" y="3069635"/>
+              <a:off x="6316576" y="4173390"/>
               <a:ext cx="49651" cy="49651"/>
             </a:xfrm>
             <a:prstGeom prst="ellipse">
@@ -13914,7 +13914,7 @@
           </p:nvSpPr>
           <p:spPr>
             <a:xfrm>
-              <a:off x="6316576" y="4173390"/>
+              <a:off x="4189892" y="2924849"/>
               <a:ext cx="49651" cy="49651"/>
             </a:xfrm>
             <a:prstGeom prst="ellipse">
@@ -13949,7 +13949,7 @@
           </p:nvSpPr>
           <p:spPr>
             <a:xfrm>
-              <a:off x="4189892" y="2924849"/>
+              <a:off x="5115216" y="3751447"/>
               <a:ext cx="49651" cy="49651"/>
             </a:xfrm>
             <a:prstGeom prst="ellipse">
@@ -13984,7 +13984,7 @@
           </p:nvSpPr>
           <p:spPr>
             <a:xfrm>
-              <a:off x="5115216" y="3751447"/>
+              <a:off x="6797091" y="3776272"/>
               <a:ext cx="49651" cy="49651"/>
             </a:xfrm>
             <a:prstGeom prst="ellipse">
@@ -14019,7 +14019,7 @@
           </p:nvSpPr>
           <p:spPr>
             <a:xfrm>
-              <a:off x="6797091" y="3776272"/>
+              <a:off x="3429651" y="2523828"/>
               <a:ext cx="49651" cy="49651"/>
             </a:xfrm>
             <a:prstGeom prst="ellipse">
@@ -14054,7 +14054,7 @@
           </p:nvSpPr>
           <p:spPr>
             <a:xfrm>
-              <a:off x="3429651" y="2523828"/>
+              <a:off x="3785422" y="2998914"/>
               <a:ext cx="49651" cy="49651"/>
             </a:xfrm>
             <a:prstGeom prst="ellipse">
@@ -14089,7 +14089,7 @@
           </p:nvSpPr>
           <p:spPr>
             <a:xfrm>
-              <a:off x="3785422" y="2998914"/>
+              <a:off x="3676775" y="3029228"/>
               <a:ext cx="49651" cy="49651"/>
             </a:xfrm>
             <a:prstGeom prst="ellipse">
@@ -14124,7 +14124,7 @@
           </p:nvSpPr>
           <p:spPr>
             <a:xfrm>
-              <a:off x="3676775" y="3029228"/>
+              <a:off x="3003516" y="2249820"/>
               <a:ext cx="49651" cy="49651"/>
             </a:xfrm>
             <a:prstGeom prst="ellipse">
@@ -14159,7 +14159,7 @@
           </p:nvSpPr>
           <p:spPr>
             <a:xfrm>
-              <a:off x="3003516" y="2249820"/>
+              <a:off x="5901158" y="4184903"/>
               <a:ext cx="49651" cy="49651"/>
             </a:xfrm>
             <a:prstGeom prst="ellipse">
@@ -14194,41 +14194,6 @@
           </p:nvSpPr>
           <p:spPr>
             <a:xfrm>
-              <a:off x="5901158" y="4184903"/>
-              <a:ext cx="49651" cy="49651"/>
-            </a:xfrm>
-            <a:prstGeom prst="ellipse">
-              <a:avLst/>
-            </a:prstGeom>
-            <a:solidFill>
-              <a:srgbClr val="000000">
-                <a:alpha val="29803"/>
-              </a:srgbClr>
-            </a:solidFill>
-            <a:ln w="9000" cap="rnd">
-              <a:solidFill>
-                <a:srgbClr val="000000">
-                  <a:alpha val="29803"/>
-                </a:srgbClr>
-              </a:solidFill>
-              <a:prstDash val="solid"/>
-              <a:round/>
-            </a:ln>
-          </p:spPr>
-          <p:txBody>
-            <a:bodyPr/>
-            <a:lstStyle/>
-            <a:p/>
-          </p:txBody>
-        </p:sp>
-        <p:sp>
-          <p:nvSpPr>
-            <p:cNvPr id="342" name="pt342"/>
-            <p:cNvSpPr/>
-            <p:nvPr/>
-          </p:nvSpPr>
-          <p:spPr>
-            <a:xfrm>
               <a:off x="4586776" y="3471244"/>
               <a:ext cx="49651" cy="49651"/>
             </a:xfrm>
@@ -14258,498 +14223,498 @@
         </p:sp>
         <p:sp>
           <p:nvSpPr>
-            <p:cNvPr id="343" name="pg343"/>
-            <p:cNvSpPr/>
-            <p:nvPr/>
-          </p:nvSpPr>
-          <p:spPr>
-            <a:xfrm>
-              <a:off x="1266926" y="2193199"/>
-              <a:ext cx="7000270" cy="2364255"/>
+            <p:cNvPr id="342" name="pg342"/>
+            <p:cNvSpPr/>
+            <p:nvPr/>
+          </p:nvSpPr>
+          <p:spPr>
+            <a:xfrm>
+              <a:off x="1266926" y="2187591"/>
+              <a:ext cx="7000270" cy="2372835"/>
             </a:xfrm>
             <a:custGeom>
               <a:avLst/>
               <a:pathLst>
-                <a:path w="7000270" h="2364255">
+                <a:path w="7000270" h="2372835">
                   <a:moveTo>
                     <a:pt x="0" y="0"/>
                   </a:moveTo>
                   <a:lnTo>
-                    <a:pt x="88611" y="29435"/>
-                  </a:lnTo>
-                  <a:lnTo>
-                    <a:pt x="177222" y="58853"/>
-                  </a:lnTo>
-                  <a:lnTo>
-                    <a:pt x="265833" y="88251"/>
-                  </a:lnTo>
-                  <a:lnTo>
-                    <a:pt x="354444" y="117628"/>
-                  </a:lnTo>
-                  <a:lnTo>
-                    <a:pt x="443055" y="146981"/>
-                  </a:lnTo>
-                  <a:lnTo>
-                    <a:pt x="531666" y="176308"/>
-                  </a:lnTo>
-                  <a:lnTo>
-                    <a:pt x="620277" y="205608"/>
-                  </a:lnTo>
-                  <a:lnTo>
-                    <a:pt x="708888" y="234876"/>
-                  </a:lnTo>
-                  <a:lnTo>
-                    <a:pt x="797499" y="264111"/>
-                  </a:lnTo>
-                  <a:lnTo>
-                    <a:pt x="886110" y="293307"/>
-                  </a:lnTo>
-                  <a:lnTo>
-                    <a:pt x="974721" y="322462"/>
-                  </a:lnTo>
-                  <a:lnTo>
-                    <a:pt x="1063332" y="351571"/>
-                  </a:lnTo>
-                  <a:lnTo>
-                    <a:pt x="1151943" y="380628"/>
-                  </a:lnTo>
-                  <a:lnTo>
-                    <a:pt x="1240554" y="409627"/>
-                  </a:lnTo>
-                  <a:lnTo>
-                    <a:pt x="1329165" y="438563"/>
-                  </a:lnTo>
-                  <a:lnTo>
-                    <a:pt x="1417776" y="467427"/>
-                  </a:lnTo>
-                  <a:lnTo>
-                    <a:pt x="1506387" y="496212"/>
-                  </a:lnTo>
-                  <a:lnTo>
-                    <a:pt x="1594998" y="524907"/>
-                  </a:lnTo>
-                  <a:lnTo>
-                    <a:pt x="1683609" y="553503"/>
-                  </a:lnTo>
-                  <a:lnTo>
-                    <a:pt x="1772220" y="581987"/>
-                  </a:lnTo>
-                  <a:lnTo>
-                    <a:pt x="1860831" y="610347"/>
-                  </a:lnTo>
-                  <a:lnTo>
-                    <a:pt x="1949442" y="638570"/>
-                  </a:lnTo>
-                  <a:lnTo>
-                    <a:pt x="2038053" y="666639"/>
-                  </a:lnTo>
-                  <a:lnTo>
-                    <a:pt x="2126664" y="694541"/>
-                  </a:lnTo>
-                  <a:lnTo>
-                    <a:pt x="2215275" y="722259"/>
-                  </a:lnTo>
-                  <a:lnTo>
-                    <a:pt x="2303886" y="749778"/>
-                  </a:lnTo>
-                  <a:lnTo>
-                    <a:pt x="2392497" y="777083"/>
-                  </a:lnTo>
-                  <a:lnTo>
-                    <a:pt x="2481108" y="804161"/>
-                  </a:lnTo>
-                  <a:lnTo>
-                    <a:pt x="2569719" y="831004"/>
-                  </a:lnTo>
-                  <a:lnTo>
-                    <a:pt x="2658330" y="857603"/>
-                  </a:lnTo>
-                  <a:lnTo>
-                    <a:pt x="2746941" y="883955"/>
-                  </a:lnTo>
-                  <a:lnTo>
-                    <a:pt x="2835552" y="910062"/>
-                  </a:lnTo>
-                  <a:lnTo>
-                    <a:pt x="2924163" y="935928"/>
-                  </a:lnTo>
-                  <a:lnTo>
-                    <a:pt x="3012774" y="961562"/>
-                  </a:lnTo>
-                  <a:lnTo>
-                    <a:pt x="3101385" y="986974"/>
-                  </a:lnTo>
-                  <a:lnTo>
-                    <a:pt x="3189996" y="1012180"/>
-                  </a:lnTo>
-                  <a:lnTo>
-                    <a:pt x="3278607" y="1037193"/>
-                  </a:lnTo>
-                  <a:lnTo>
-                    <a:pt x="3367218" y="1062029"/>
-                  </a:lnTo>
-                  <a:lnTo>
-                    <a:pt x="3455829" y="1086704"/>
-                  </a:lnTo>
-                  <a:lnTo>
-                    <a:pt x="3544440" y="1111234"/>
-                  </a:lnTo>
-                  <a:lnTo>
-                    <a:pt x="3633051" y="1135631"/>
-                  </a:lnTo>
-                  <a:lnTo>
-                    <a:pt x="3721662" y="1159911"/>
-                  </a:lnTo>
-                  <a:lnTo>
-                    <a:pt x="3810273" y="1184084"/>
-                  </a:lnTo>
-                  <a:lnTo>
-                    <a:pt x="3898884" y="1208163"/>
-                  </a:lnTo>
-                  <a:lnTo>
-                    <a:pt x="3987495" y="1232156"/>
-                  </a:lnTo>
-                  <a:lnTo>
-                    <a:pt x="4076107" y="1256074"/>
-                  </a:lnTo>
-                  <a:lnTo>
-                    <a:pt x="4164718" y="1279924"/>
-                  </a:lnTo>
-                  <a:lnTo>
-                    <a:pt x="4253329" y="1303713"/>
-                  </a:lnTo>
-                  <a:lnTo>
-                    <a:pt x="4341940" y="1327448"/>
-                  </a:lnTo>
-                  <a:lnTo>
-                    <a:pt x="4430551" y="1351133"/>
-                  </a:lnTo>
-                  <a:lnTo>
-                    <a:pt x="4519162" y="1374774"/>
-                  </a:lnTo>
-                  <a:lnTo>
-                    <a:pt x="4607773" y="1398375"/>
-                  </a:lnTo>
-                  <a:lnTo>
-                    <a:pt x="4696384" y="1421940"/>
-                  </a:lnTo>
-                  <a:lnTo>
-                    <a:pt x="4784995" y="1445472"/>
-                  </a:lnTo>
-                  <a:lnTo>
-                    <a:pt x="4873606" y="1468975"/>
-                  </a:lnTo>
-                  <a:lnTo>
-                    <a:pt x="4962217" y="1492451"/>
-                  </a:lnTo>
-                  <a:lnTo>
-                    <a:pt x="5050828" y="1515902"/>
-                  </a:lnTo>
-                  <a:lnTo>
-                    <a:pt x="5139439" y="1539330"/>
-                  </a:lnTo>
-                  <a:lnTo>
-                    <a:pt x="5228050" y="1562738"/>
-                  </a:lnTo>
-                  <a:lnTo>
-                    <a:pt x="5316661" y="1586127"/>
-                  </a:lnTo>
-                  <a:lnTo>
-                    <a:pt x="5405272" y="1609499"/>
-                  </a:lnTo>
-                  <a:lnTo>
-                    <a:pt x="5493883" y="1632855"/>
-                  </a:lnTo>
-                  <a:lnTo>
-                    <a:pt x="5582494" y="1656196"/>
-                  </a:lnTo>
-                  <a:lnTo>
-                    <a:pt x="5671105" y="1679524"/>
-                  </a:lnTo>
-                  <a:lnTo>
-                    <a:pt x="5759716" y="1702839"/>
-                  </a:lnTo>
-                  <a:lnTo>
-                    <a:pt x="5848327" y="1726142"/>
-                  </a:lnTo>
-                  <a:lnTo>
-                    <a:pt x="5936938" y="1749434"/>
-                  </a:lnTo>
-                  <a:lnTo>
-                    <a:pt x="6025549" y="1772717"/>
-                  </a:lnTo>
-                  <a:lnTo>
-                    <a:pt x="6114160" y="1795990"/>
-                  </a:lnTo>
-                  <a:lnTo>
-                    <a:pt x="6202771" y="1819254"/>
-                  </a:lnTo>
-                  <a:lnTo>
-                    <a:pt x="6291382" y="1842510"/>
-                  </a:lnTo>
-                  <a:lnTo>
-                    <a:pt x="6379993" y="1865759"/>
-                  </a:lnTo>
-                  <a:lnTo>
-                    <a:pt x="6468604" y="1889000"/>
-                  </a:lnTo>
-                  <a:lnTo>
-                    <a:pt x="6557215" y="1912235"/>
-                  </a:lnTo>
-                  <a:lnTo>
-                    <a:pt x="6645826" y="1935463"/>
-                  </a:lnTo>
-                  <a:lnTo>
-                    <a:pt x="6734437" y="1958686"/>
-                  </a:lnTo>
-                  <a:lnTo>
-                    <a:pt x="6823048" y="1981903"/>
-                  </a:lnTo>
-                  <a:lnTo>
-                    <a:pt x="6911659" y="2005114"/>
-                  </a:lnTo>
-                  <a:lnTo>
-                    <a:pt x="7000270" y="2028321"/>
-                  </a:lnTo>
-                  <a:lnTo>
-                    <a:pt x="7000270" y="2364255"/>
-                  </a:lnTo>
-                  <a:lnTo>
-                    <a:pt x="6911659" y="2334646"/>
-                  </a:lnTo>
-                  <a:lnTo>
-                    <a:pt x="6823048" y="2305043"/>
-                  </a:lnTo>
-                  <a:lnTo>
-                    <a:pt x="6734437" y="2275445"/>
-                  </a:lnTo>
-                  <a:lnTo>
-                    <a:pt x="6645826" y="2245852"/>
-                  </a:lnTo>
-                  <a:lnTo>
-                    <a:pt x="6557215" y="2216266"/>
-                  </a:lnTo>
-                  <a:lnTo>
-                    <a:pt x="6468604" y="2186685"/>
-                  </a:lnTo>
-                  <a:lnTo>
-                    <a:pt x="6379993" y="2157112"/>
-                  </a:lnTo>
-                  <a:lnTo>
-                    <a:pt x="6291382" y="2127545"/>
-                  </a:lnTo>
-                  <a:lnTo>
-                    <a:pt x="6202771" y="2097986"/>
-                  </a:lnTo>
-                  <a:lnTo>
-                    <a:pt x="6114160" y="2068436"/>
-                  </a:lnTo>
-                  <a:lnTo>
-                    <a:pt x="6025549" y="2038894"/>
-                  </a:lnTo>
-                  <a:lnTo>
-                    <a:pt x="5936938" y="2009361"/>
-                  </a:lnTo>
-                  <a:lnTo>
-                    <a:pt x="5848327" y="1979839"/>
-                  </a:lnTo>
-                  <a:lnTo>
-                    <a:pt x="5759716" y="1950327"/>
-                  </a:lnTo>
-                  <a:lnTo>
-                    <a:pt x="5671105" y="1920827"/>
-                  </a:lnTo>
-                  <a:lnTo>
-                    <a:pt x="5582494" y="1891339"/>
-                  </a:lnTo>
-                  <a:lnTo>
-                    <a:pt x="5493883" y="1861865"/>
-                  </a:lnTo>
-                  <a:lnTo>
-                    <a:pt x="5405272" y="1832406"/>
-                  </a:lnTo>
-                  <a:lnTo>
-                    <a:pt x="5316661" y="1802963"/>
-                  </a:lnTo>
-                  <a:lnTo>
-                    <a:pt x="5228050" y="1773537"/>
-                  </a:lnTo>
-                  <a:lnTo>
-                    <a:pt x="5139439" y="1744130"/>
-                  </a:lnTo>
-                  <a:lnTo>
-                    <a:pt x="5050828" y="1714744"/>
-                  </a:lnTo>
-                  <a:lnTo>
-                    <a:pt x="4962217" y="1685380"/>
-                  </a:lnTo>
-                  <a:lnTo>
-                    <a:pt x="4873606" y="1656040"/>
-                  </a:lnTo>
-                  <a:lnTo>
-                    <a:pt x="4784995" y="1626728"/>
-                  </a:lnTo>
-                  <a:lnTo>
-                    <a:pt x="4696384" y="1597445"/>
-                  </a:lnTo>
-                  <a:lnTo>
-                    <a:pt x="4607773" y="1568195"/>
-                  </a:lnTo>
-                  <a:lnTo>
-                    <a:pt x="4519162" y="1538981"/>
-                  </a:lnTo>
-                  <a:lnTo>
-                    <a:pt x="4430551" y="1509807"/>
-                  </a:lnTo>
-                  <a:lnTo>
-                    <a:pt x="4341940" y="1480677"/>
-                  </a:lnTo>
-                  <a:lnTo>
-                    <a:pt x="4253329" y="1451597"/>
-                  </a:lnTo>
-                  <a:lnTo>
-                    <a:pt x="4164718" y="1422571"/>
-                  </a:lnTo>
-                  <a:lnTo>
-                    <a:pt x="4076107" y="1393606"/>
-                  </a:lnTo>
-                  <a:lnTo>
-                    <a:pt x="3987495" y="1364709"/>
-                  </a:lnTo>
-                  <a:lnTo>
-                    <a:pt x="3898884" y="1335887"/>
-                  </a:lnTo>
-                  <a:lnTo>
-                    <a:pt x="3810273" y="1307151"/>
-                  </a:lnTo>
-                  <a:lnTo>
-                    <a:pt x="3721662" y="1278509"/>
-                  </a:lnTo>
-                  <a:lnTo>
-                    <a:pt x="3633051" y="1249974"/>
-                  </a:lnTo>
-                  <a:lnTo>
-                    <a:pt x="3544440" y="1221556"/>
-                  </a:lnTo>
-                  <a:lnTo>
-                    <a:pt x="3455829" y="1193271"/>
-                  </a:lnTo>
-                  <a:lnTo>
-                    <a:pt x="3367218" y="1165131"/>
-                  </a:lnTo>
-                  <a:lnTo>
-                    <a:pt x="3278607" y="1137152"/>
-                  </a:lnTo>
-                  <a:lnTo>
-                    <a:pt x="3189996" y="1109350"/>
-                  </a:lnTo>
-                  <a:lnTo>
-                    <a:pt x="3101385" y="1081741"/>
-                  </a:lnTo>
-                  <a:lnTo>
-                    <a:pt x="3012774" y="1054338"/>
-                  </a:lnTo>
-                  <a:lnTo>
-                    <a:pt x="2924163" y="1027157"/>
-                  </a:lnTo>
-                  <a:lnTo>
-                    <a:pt x="2835552" y="1000208"/>
-                  </a:lnTo>
-                  <a:lnTo>
-                    <a:pt x="2746941" y="973500"/>
-                  </a:lnTo>
-                  <a:lnTo>
-                    <a:pt x="2658330" y="947037"/>
-                  </a:lnTo>
-                  <a:lnTo>
-                    <a:pt x="2569719" y="920821"/>
-                  </a:lnTo>
-                  <a:lnTo>
-                    <a:pt x="2481108" y="894848"/>
-                  </a:lnTo>
-                  <a:lnTo>
-                    <a:pt x="2392497" y="869112"/>
-                  </a:lnTo>
-                  <a:lnTo>
-                    <a:pt x="2303886" y="843602"/>
-                  </a:lnTo>
-                  <a:lnTo>
-                    <a:pt x="2215275" y="818306"/>
-                  </a:lnTo>
-                  <a:lnTo>
-                    <a:pt x="2126664" y="793209"/>
-                  </a:lnTo>
-                  <a:lnTo>
-                    <a:pt x="2038053" y="768295"/>
-                  </a:lnTo>
-                  <a:lnTo>
-                    <a:pt x="1949442" y="743550"/>
-                  </a:lnTo>
-                  <a:lnTo>
-                    <a:pt x="1860831" y="718957"/>
-                  </a:lnTo>
-                  <a:lnTo>
-                    <a:pt x="1772220" y="694503"/>
-                  </a:lnTo>
-                  <a:lnTo>
-                    <a:pt x="1683609" y="670172"/>
-                  </a:lnTo>
-                  <a:lnTo>
-                    <a:pt x="1594998" y="645953"/>
-                  </a:lnTo>
-                  <a:lnTo>
-                    <a:pt x="1506387" y="621833"/>
-                  </a:lnTo>
-                  <a:lnTo>
-                    <a:pt x="1417776" y="597803"/>
-                  </a:lnTo>
-                  <a:lnTo>
-                    <a:pt x="1329165" y="573852"/>
-                  </a:lnTo>
-                  <a:lnTo>
-                    <a:pt x="1240554" y="549973"/>
-                  </a:lnTo>
-                  <a:lnTo>
-                    <a:pt x="1151943" y="526157"/>
-                  </a:lnTo>
-                  <a:lnTo>
-                    <a:pt x="1063332" y="502399"/>
-                  </a:lnTo>
-                  <a:lnTo>
-                    <a:pt x="974721" y="478692"/>
-                  </a:lnTo>
-                  <a:lnTo>
-                    <a:pt x="886110" y="455032"/>
-                  </a:lnTo>
-                  <a:lnTo>
-                    <a:pt x="797499" y="431414"/>
-                  </a:lnTo>
-                  <a:lnTo>
-                    <a:pt x="708888" y="407833"/>
-                  </a:lnTo>
-                  <a:lnTo>
-                    <a:pt x="620277" y="384287"/>
-                  </a:lnTo>
-                  <a:lnTo>
-                    <a:pt x="531666" y="360771"/>
-                  </a:lnTo>
-                  <a:lnTo>
-                    <a:pt x="443055" y="337284"/>
-                  </a:lnTo>
-                  <a:lnTo>
-                    <a:pt x="354444" y="313822"/>
-                  </a:lnTo>
-                  <a:lnTo>
-                    <a:pt x="265833" y="290384"/>
-                  </a:lnTo>
-                  <a:lnTo>
-                    <a:pt x="177222" y="266967"/>
-                  </a:lnTo>
-                  <a:lnTo>
-                    <a:pt x="88611" y="243569"/>
-                  </a:lnTo>
-                  <a:lnTo>
-                    <a:pt x="0" y="220190"/>
+                    <a:pt x="88611" y="29545"/>
+                  </a:lnTo>
+                  <a:lnTo>
+                    <a:pt x="177222" y="59072"/>
+                  </a:lnTo>
+                  <a:lnTo>
+                    <a:pt x="265833" y="88580"/>
+                  </a:lnTo>
+                  <a:lnTo>
+                    <a:pt x="354444" y="118067"/>
+                  </a:lnTo>
+                  <a:lnTo>
+                    <a:pt x="443055" y="147530"/>
+                  </a:lnTo>
+                  <a:lnTo>
+                    <a:pt x="531666" y="176968"/>
+                  </a:lnTo>
+                  <a:lnTo>
+                    <a:pt x="620277" y="206378"/>
+                  </a:lnTo>
+                  <a:lnTo>
+                    <a:pt x="708888" y="235757"/>
+                  </a:lnTo>
+                  <a:lnTo>
+                    <a:pt x="797499" y="265102"/>
+                  </a:lnTo>
+                  <a:lnTo>
+                    <a:pt x="886110" y="294409"/>
+                  </a:lnTo>
+                  <a:lnTo>
+                    <a:pt x="974721" y="323675"/>
+                  </a:lnTo>
+                  <a:lnTo>
+                    <a:pt x="1063332" y="352894"/>
+                  </a:lnTo>
+                  <a:lnTo>
+                    <a:pt x="1151943" y="382063"/>
+                  </a:lnTo>
+                  <a:lnTo>
+                    <a:pt x="1240554" y="411174"/>
+                  </a:lnTo>
+                  <a:lnTo>
+                    <a:pt x="1329165" y="440221"/>
+                  </a:lnTo>
+                  <a:lnTo>
+                    <a:pt x="1417776" y="469198"/>
+                  </a:lnTo>
+                  <a:lnTo>
+                    <a:pt x="1506387" y="498095"/>
+                  </a:lnTo>
+                  <a:lnTo>
+                    <a:pt x="1594998" y="526904"/>
+                  </a:lnTo>
+                  <a:lnTo>
+                    <a:pt x="1683609" y="555614"/>
+                  </a:lnTo>
+                  <a:lnTo>
+                    <a:pt x="1772220" y="584212"/>
+                  </a:lnTo>
+                  <a:lnTo>
+                    <a:pt x="1860831" y="612688"/>
+                  </a:lnTo>
+                  <a:lnTo>
+                    <a:pt x="1949442" y="641026"/>
+                  </a:lnTo>
+                  <a:lnTo>
+                    <a:pt x="2038053" y="669213"/>
+                  </a:lnTo>
+                  <a:lnTo>
+                    <a:pt x="2126664" y="697232"/>
+                  </a:lnTo>
+                  <a:lnTo>
+                    <a:pt x="2215275" y="725069"/>
+                  </a:lnTo>
+                  <a:lnTo>
+                    <a:pt x="2303886" y="752707"/>
+                  </a:lnTo>
+                  <a:lnTo>
+                    <a:pt x="2392497" y="780133"/>
+                  </a:lnTo>
+                  <a:lnTo>
+                    <a:pt x="2481108" y="807334"/>
+                  </a:lnTo>
+                  <a:lnTo>
+                    <a:pt x="2569719" y="834299"/>
+                  </a:lnTo>
+                  <a:lnTo>
+                    <a:pt x="2658330" y="861021"/>
+                  </a:lnTo>
+                  <a:lnTo>
+                    <a:pt x="2746941" y="887498"/>
+                  </a:lnTo>
+                  <a:lnTo>
+                    <a:pt x="2835552" y="913731"/>
+                  </a:lnTo>
+                  <a:lnTo>
+                    <a:pt x="2924163" y="939723"/>
+                  </a:lnTo>
+                  <a:lnTo>
+                    <a:pt x="3012774" y="965483"/>
+                  </a:lnTo>
+                  <a:lnTo>
+                    <a:pt x="3101385" y="991022"/>
+                  </a:lnTo>
+                  <a:lnTo>
+                    <a:pt x="3189996" y="1016355"/>
+                  </a:lnTo>
+                  <a:lnTo>
+                    <a:pt x="3278607" y="1041495"/>
+                  </a:lnTo>
+                  <a:lnTo>
+                    <a:pt x="3367218" y="1066458"/>
+                  </a:lnTo>
+                  <a:lnTo>
+                    <a:pt x="3455829" y="1091260"/>
+                  </a:lnTo>
+                  <a:lnTo>
+                    <a:pt x="3544440" y="1115916"/>
+                  </a:lnTo>
+                  <a:lnTo>
+                    <a:pt x="3633051" y="1140441"/>
+                  </a:lnTo>
+                  <a:lnTo>
+                    <a:pt x="3721662" y="1164847"/>
+                  </a:lnTo>
+                  <a:lnTo>
+                    <a:pt x="3810273" y="1189147"/>
+                  </a:lnTo>
+                  <a:lnTo>
+                    <a:pt x="3898884" y="1213352"/>
+                  </a:lnTo>
+                  <a:lnTo>
+                    <a:pt x="3987495" y="1237473"/>
+                  </a:lnTo>
+                  <a:lnTo>
+                    <a:pt x="4076107" y="1261517"/>
+                  </a:lnTo>
+                  <a:lnTo>
+                    <a:pt x="4164718" y="1285493"/>
+                  </a:lnTo>
+                  <a:lnTo>
+                    <a:pt x="4253329" y="1309409"/>
+                  </a:lnTo>
+                  <a:lnTo>
+                    <a:pt x="4341940" y="1333269"/>
+                  </a:lnTo>
+                  <a:lnTo>
+                    <a:pt x="4430551" y="1357080"/>
+                  </a:lnTo>
+                  <a:lnTo>
+                    <a:pt x="4519162" y="1380847"/>
+                  </a:lnTo>
+                  <a:lnTo>
+                    <a:pt x="4607773" y="1404575"/>
+                  </a:lnTo>
+                  <a:lnTo>
+                    <a:pt x="4696384" y="1428265"/>
+                  </a:lnTo>
+                  <a:lnTo>
+                    <a:pt x="4784995" y="1451924"/>
+                  </a:lnTo>
+                  <a:lnTo>
+                    <a:pt x="4873606" y="1475552"/>
+                  </a:lnTo>
+                  <a:lnTo>
+                    <a:pt x="4962217" y="1499154"/>
+                  </a:lnTo>
+                  <a:lnTo>
+                    <a:pt x="5050828" y="1522730"/>
+                  </a:lnTo>
+                  <a:lnTo>
+                    <a:pt x="5139439" y="1546285"/>
+                  </a:lnTo>
+                  <a:lnTo>
+                    <a:pt x="5228050" y="1569818"/>
+                  </a:lnTo>
+                  <a:lnTo>
+                    <a:pt x="5316661" y="1593333"/>
+                  </a:lnTo>
+                  <a:lnTo>
+                    <a:pt x="5405272" y="1616831"/>
+                  </a:lnTo>
+                  <a:lnTo>
+                    <a:pt x="5493883" y="1640312"/>
+                  </a:lnTo>
+                  <a:lnTo>
+                    <a:pt x="5582494" y="1663779"/>
+                  </a:lnTo>
+                  <a:lnTo>
+                    <a:pt x="5671105" y="1687232"/>
+                  </a:lnTo>
+                  <a:lnTo>
+                    <a:pt x="5759716" y="1710673"/>
+                  </a:lnTo>
+                  <a:lnTo>
+                    <a:pt x="5848327" y="1734101"/>
+                  </a:lnTo>
+                  <a:lnTo>
+                    <a:pt x="5936938" y="1757520"/>
+                  </a:lnTo>
+                  <a:lnTo>
+                    <a:pt x="6025549" y="1780928"/>
+                  </a:lnTo>
+                  <a:lnTo>
+                    <a:pt x="6114160" y="1804326"/>
+                  </a:lnTo>
+                  <a:lnTo>
+                    <a:pt x="6202771" y="1827716"/>
+                  </a:lnTo>
+                  <a:lnTo>
+                    <a:pt x="6291382" y="1851098"/>
+                  </a:lnTo>
+                  <a:lnTo>
+                    <a:pt x="6379993" y="1874472"/>
+                  </a:lnTo>
+                  <a:lnTo>
+                    <a:pt x="6468604" y="1897839"/>
+                  </a:lnTo>
+                  <a:lnTo>
+                    <a:pt x="6557215" y="1921199"/>
+                  </a:lnTo>
+                  <a:lnTo>
+                    <a:pt x="6645826" y="1944553"/>
+                  </a:lnTo>
+                  <a:lnTo>
+                    <a:pt x="6734437" y="1967901"/>
+                  </a:lnTo>
+                  <a:lnTo>
+                    <a:pt x="6823048" y="1991244"/>
+                  </a:lnTo>
+                  <a:lnTo>
+                    <a:pt x="6911659" y="2014581"/>
+                  </a:lnTo>
+                  <a:lnTo>
+                    <a:pt x="7000270" y="2037913"/>
+                  </a:lnTo>
+                  <a:lnTo>
+                    <a:pt x="7000270" y="2372835"/>
+                  </a:lnTo>
+                  <a:lnTo>
+                    <a:pt x="6911659" y="2343117"/>
+                  </a:lnTo>
+                  <a:lnTo>
+                    <a:pt x="6823048" y="2313405"/>
+                  </a:lnTo>
+                  <a:lnTo>
+                    <a:pt x="6734437" y="2283698"/>
+                  </a:lnTo>
+                  <a:lnTo>
+                    <a:pt x="6645826" y="2253997"/>
+                  </a:lnTo>
+                  <a:lnTo>
+                    <a:pt x="6557215" y="2224301"/>
+                  </a:lnTo>
+                  <a:lnTo>
+                    <a:pt x="6468604" y="2194612"/>
+                  </a:lnTo>
+                  <a:lnTo>
+                    <a:pt x="6379993" y="2164930"/>
+                  </a:lnTo>
+                  <a:lnTo>
+                    <a:pt x="6291382" y="2135255"/>
+                  </a:lnTo>
+                  <a:lnTo>
+                    <a:pt x="6202771" y="2105587"/>
+                  </a:lnTo>
+                  <a:lnTo>
+                    <a:pt x="6114160" y="2075927"/>
+                  </a:lnTo>
+                  <a:lnTo>
+                    <a:pt x="6025549" y="2046277"/>
+                  </a:lnTo>
+                  <a:lnTo>
+                    <a:pt x="5936938" y="2016635"/>
+                  </a:lnTo>
+                  <a:lnTo>
+                    <a:pt x="5848327" y="1987004"/>
+                  </a:lnTo>
+                  <a:lnTo>
+                    <a:pt x="5759716" y="1957383"/>
+                  </a:lnTo>
+                  <a:lnTo>
+                    <a:pt x="5671105" y="1927774"/>
+                  </a:lnTo>
+                  <a:lnTo>
+                    <a:pt x="5582494" y="1898178"/>
+                  </a:lnTo>
+                  <a:lnTo>
+                    <a:pt x="5493883" y="1868596"/>
+                  </a:lnTo>
+                  <a:lnTo>
+                    <a:pt x="5405272" y="1839028"/>
+                  </a:lnTo>
+                  <a:lnTo>
+                    <a:pt x="5316661" y="1809476"/>
+                  </a:lnTo>
+                  <a:lnTo>
+                    <a:pt x="5228050" y="1779941"/>
+                  </a:lnTo>
+                  <a:lnTo>
+                    <a:pt x="5139439" y="1750425"/>
+                  </a:lnTo>
+                  <a:lnTo>
+                    <a:pt x="5050828" y="1720930"/>
+                  </a:lnTo>
+                  <a:lnTo>
+                    <a:pt x="4962217" y="1691458"/>
+                  </a:lnTo>
+                  <a:lnTo>
+                    <a:pt x="4873606" y="1662010"/>
+                  </a:lnTo>
+                  <a:lnTo>
+                    <a:pt x="4784995" y="1632589"/>
+                  </a:lnTo>
+                  <a:lnTo>
+                    <a:pt x="4696384" y="1603198"/>
+                  </a:lnTo>
+                  <a:lnTo>
+                    <a:pt x="4607773" y="1573839"/>
+                  </a:lnTo>
+                  <a:lnTo>
+                    <a:pt x="4519162" y="1544517"/>
+                  </a:lnTo>
+                  <a:lnTo>
+                    <a:pt x="4430551" y="1515234"/>
+                  </a:lnTo>
+                  <a:lnTo>
+                    <a:pt x="4341940" y="1485996"/>
+                  </a:lnTo>
+                  <a:lnTo>
+                    <a:pt x="4253329" y="1456807"/>
+                  </a:lnTo>
+                  <a:lnTo>
+                    <a:pt x="4164718" y="1427673"/>
+                  </a:lnTo>
+                  <a:lnTo>
+                    <a:pt x="4076107" y="1398600"/>
+                  </a:lnTo>
+                  <a:lnTo>
+                    <a:pt x="3987495" y="1369595"/>
+                  </a:lnTo>
+                  <a:lnTo>
+                    <a:pt x="3898884" y="1340666"/>
+                  </a:lnTo>
+                  <a:lnTo>
+                    <a:pt x="3810273" y="1311822"/>
+                  </a:lnTo>
+                  <a:lnTo>
+                    <a:pt x="3721662" y="1283073"/>
+                  </a:lnTo>
+                  <a:lnTo>
+                    <a:pt x="3633051" y="1254429"/>
+                  </a:lnTo>
+                  <a:lnTo>
+                    <a:pt x="3544440" y="1225904"/>
+                  </a:lnTo>
+                  <a:lnTo>
+                    <a:pt x="3455829" y="1197511"/>
+                  </a:lnTo>
+                  <a:lnTo>
+                    <a:pt x="3367218" y="1169264"/>
+                  </a:lnTo>
+                  <a:lnTo>
+                    <a:pt x="3278607" y="1141178"/>
+                  </a:lnTo>
+                  <a:lnTo>
+                    <a:pt x="3189996" y="1113269"/>
+                  </a:lnTo>
+                  <a:lnTo>
+                    <a:pt x="3101385" y="1085552"/>
+                  </a:lnTo>
+                  <a:lnTo>
+                    <a:pt x="3012774" y="1058042"/>
+                  </a:lnTo>
+                  <a:lnTo>
+                    <a:pt x="2924163" y="1030752"/>
+                  </a:lnTo>
+                  <a:lnTo>
+                    <a:pt x="2835552" y="1003695"/>
+                  </a:lnTo>
+                  <a:lnTo>
+                    <a:pt x="2746941" y="976878"/>
+                  </a:lnTo>
+                  <a:lnTo>
+                    <a:pt x="2658330" y="950305"/>
+                  </a:lnTo>
+                  <a:lnTo>
+                    <a:pt x="2569719" y="923979"/>
+                  </a:lnTo>
+                  <a:lnTo>
+                    <a:pt x="2481108" y="897894"/>
+                  </a:lnTo>
+                  <a:lnTo>
+                    <a:pt x="2392497" y="872045"/>
+                  </a:lnTo>
+                  <a:lnTo>
+                    <a:pt x="2303886" y="846422"/>
+                  </a:lnTo>
+                  <a:lnTo>
+                    <a:pt x="2215275" y="821011"/>
+                  </a:lnTo>
+                  <a:lnTo>
+                    <a:pt x="2126664" y="795798"/>
+                  </a:lnTo>
+                  <a:lnTo>
+                    <a:pt x="2038053" y="770768"/>
+                  </a:lnTo>
+                  <a:lnTo>
+                    <a:pt x="1949442" y="745905"/>
+                  </a:lnTo>
+                  <a:lnTo>
+                    <a:pt x="1860831" y="721194"/>
+                  </a:lnTo>
+                  <a:lnTo>
+                    <a:pt x="1772220" y="696620"/>
+                  </a:lnTo>
+                  <a:lnTo>
+                    <a:pt x="1683609" y="672170"/>
+                  </a:lnTo>
+                  <a:lnTo>
+                    <a:pt x="1594998" y="647830"/>
+                  </a:lnTo>
+                  <a:lnTo>
+                    <a:pt x="1506387" y="623589"/>
+                  </a:lnTo>
+                  <a:lnTo>
+                    <a:pt x="1417776" y="599437"/>
+                  </a:lnTo>
+                  <a:lnTo>
+                    <a:pt x="1329165" y="575364"/>
+                  </a:lnTo>
+                  <a:lnTo>
+                    <a:pt x="1240554" y="551362"/>
+                  </a:lnTo>
+                  <a:lnTo>
+                    <a:pt x="1151943" y="527424"/>
+                  </a:lnTo>
+                  <a:lnTo>
+                    <a:pt x="1063332" y="503543"/>
+                  </a:lnTo>
+                  <a:lnTo>
+                    <a:pt x="974721" y="479713"/>
+                  </a:lnTo>
+                  <a:lnTo>
+                    <a:pt x="886110" y="455930"/>
+                  </a:lnTo>
+                  <a:lnTo>
+                    <a:pt x="797499" y="432188"/>
+                  </a:lnTo>
+                  <a:lnTo>
+                    <a:pt x="708888" y="408483"/>
+                  </a:lnTo>
+                  <a:lnTo>
+                    <a:pt x="620277" y="384813"/>
+                  </a:lnTo>
+                  <a:lnTo>
+                    <a:pt x="531666" y="361173"/>
+                  </a:lnTo>
+                  <a:lnTo>
+                    <a:pt x="443055" y="337561"/>
+                  </a:lnTo>
+                  <a:lnTo>
+                    <a:pt x="354444" y="313975"/>
+                  </a:lnTo>
+                  <a:lnTo>
+                    <a:pt x="265833" y="290412"/>
+                  </a:lnTo>
+                  <a:lnTo>
+                    <a:pt x="177222" y="266871"/>
+                  </a:lnTo>
+                  <a:lnTo>
+                    <a:pt x="88611" y="243349"/>
+                  </a:lnTo>
+                  <a:lnTo>
+                    <a:pt x="0" y="219845"/>
                   </a:lnTo>
                   <a:close/>
                 </a:path>
@@ -14769,258 +14734,258 @@
         </p:sp>
         <p:sp>
           <p:nvSpPr>
-            <p:cNvPr id="344" name="pl344"/>
-            <p:cNvSpPr/>
-            <p:nvPr/>
-          </p:nvSpPr>
-          <p:spPr>
-            <a:xfrm>
-              <a:off x="1266926" y="2193199"/>
-              <a:ext cx="7000270" cy="2028321"/>
+            <p:cNvPr id="343" name="pl343"/>
+            <p:cNvSpPr/>
+            <p:nvPr/>
+          </p:nvSpPr>
+          <p:spPr>
+            <a:xfrm>
+              <a:off x="1266926" y="2187591"/>
+              <a:ext cx="7000270" cy="2037913"/>
             </a:xfrm>
             <a:custGeom>
               <a:avLst/>
               <a:pathLst>
-                <a:path w="7000270" h="2028321">
+                <a:path w="7000270" h="2037913">
                   <a:moveTo>
                     <a:pt x="0" y="0"/>
                   </a:moveTo>
                   <a:lnTo>
-                    <a:pt x="88611" y="29435"/>
-                  </a:lnTo>
-                  <a:lnTo>
-                    <a:pt x="177222" y="58853"/>
-                  </a:lnTo>
-                  <a:lnTo>
-                    <a:pt x="265833" y="88251"/>
-                  </a:lnTo>
-                  <a:lnTo>
-                    <a:pt x="354444" y="117628"/>
-                  </a:lnTo>
-                  <a:lnTo>
-                    <a:pt x="443055" y="146981"/>
-                  </a:lnTo>
-                  <a:lnTo>
-                    <a:pt x="531666" y="176308"/>
-                  </a:lnTo>
-                  <a:lnTo>
-                    <a:pt x="620277" y="205608"/>
-                  </a:lnTo>
-                  <a:lnTo>
-                    <a:pt x="708888" y="234876"/>
-                  </a:lnTo>
-                  <a:lnTo>
-                    <a:pt x="797499" y="264111"/>
-                  </a:lnTo>
-                  <a:lnTo>
-                    <a:pt x="886110" y="293307"/>
-                  </a:lnTo>
-                  <a:lnTo>
-                    <a:pt x="974721" y="322462"/>
-                  </a:lnTo>
-                  <a:lnTo>
-                    <a:pt x="1063332" y="351571"/>
-                  </a:lnTo>
-                  <a:lnTo>
-                    <a:pt x="1151943" y="380628"/>
-                  </a:lnTo>
-                  <a:lnTo>
-                    <a:pt x="1240554" y="409627"/>
-                  </a:lnTo>
-                  <a:lnTo>
-                    <a:pt x="1329165" y="438563"/>
-                  </a:lnTo>
-                  <a:lnTo>
-                    <a:pt x="1417776" y="467427"/>
-                  </a:lnTo>
-                  <a:lnTo>
-                    <a:pt x="1506387" y="496212"/>
-                  </a:lnTo>
-                  <a:lnTo>
-                    <a:pt x="1594998" y="524907"/>
-                  </a:lnTo>
-                  <a:lnTo>
-                    <a:pt x="1683609" y="553503"/>
-                  </a:lnTo>
-                  <a:lnTo>
-                    <a:pt x="1772220" y="581987"/>
-                  </a:lnTo>
-                  <a:lnTo>
-                    <a:pt x="1860831" y="610347"/>
-                  </a:lnTo>
-                  <a:lnTo>
-                    <a:pt x="1949442" y="638570"/>
-                  </a:lnTo>
-                  <a:lnTo>
-                    <a:pt x="2038053" y="666639"/>
-                  </a:lnTo>
-                  <a:lnTo>
-                    <a:pt x="2126664" y="694541"/>
-                  </a:lnTo>
-                  <a:lnTo>
-                    <a:pt x="2215275" y="722259"/>
-                  </a:lnTo>
-                  <a:lnTo>
-                    <a:pt x="2303886" y="749778"/>
-                  </a:lnTo>
-                  <a:lnTo>
-                    <a:pt x="2392497" y="777083"/>
-                  </a:lnTo>
-                  <a:lnTo>
-                    <a:pt x="2481108" y="804161"/>
-                  </a:lnTo>
-                  <a:lnTo>
-                    <a:pt x="2569719" y="831004"/>
-                  </a:lnTo>
-                  <a:lnTo>
-                    <a:pt x="2658330" y="857603"/>
-                  </a:lnTo>
-                  <a:lnTo>
-                    <a:pt x="2746941" y="883955"/>
-                  </a:lnTo>
-                  <a:lnTo>
-                    <a:pt x="2835552" y="910062"/>
-                  </a:lnTo>
-                  <a:lnTo>
-                    <a:pt x="2924163" y="935928"/>
-                  </a:lnTo>
-                  <a:lnTo>
-                    <a:pt x="3012774" y="961562"/>
-                  </a:lnTo>
-                  <a:lnTo>
-                    <a:pt x="3101385" y="986974"/>
-                  </a:lnTo>
-                  <a:lnTo>
-                    <a:pt x="3189996" y="1012180"/>
-                  </a:lnTo>
-                  <a:lnTo>
-                    <a:pt x="3278607" y="1037193"/>
-                  </a:lnTo>
-                  <a:lnTo>
-                    <a:pt x="3367218" y="1062029"/>
-                  </a:lnTo>
-                  <a:lnTo>
-                    <a:pt x="3455829" y="1086704"/>
-                  </a:lnTo>
-                  <a:lnTo>
-                    <a:pt x="3544440" y="1111234"/>
-                  </a:lnTo>
-                  <a:lnTo>
-                    <a:pt x="3633051" y="1135631"/>
-                  </a:lnTo>
-                  <a:lnTo>
-                    <a:pt x="3721662" y="1159911"/>
-                  </a:lnTo>
-                  <a:lnTo>
-                    <a:pt x="3810273" y="1184084"/>
-                  </a:lnTo>
-                  <a:lnTo>
-                    <a:pt x="3898884" y="1208163"/>
-                  </a:lnTo>
-                  <a:lnTo>
-                    <a:pt x="3987495" y="1232156"/>
-                  </a:lnTo>
-                  <a:lnTo>
-                    <a:pt x="4076107" y="1256074"/>
-                  </a:lnTo>
-                  <a:lnTo>
-                    <a:pt x="4164718" y="1279924"/>
-                  </a:lnTo>
-                  <a:lnTo>
-                    <a:pt x="4253329" y="1303713"/>
-                  </a:lnTo>
-                  <a:lnTo>
-                    <a:pt x="4341940" y="1327448"/>
-                  </a:lnTo>
-                  <a:lnTo>
-                    <a:pt x="4430551" y="1351133"/>
-                  </a:lnTo>
-                  <a:lnTo>
-                    <a:pt x="4519162" y="1374774"/>
-                  </a:lnTo>
-                  <a:lnTo>
-                    <a:pt x="4607773" y="1398375"/>
-                  </a:lnTo>
-                  <a:lnTo>
-                    <a:pt x="4696384" y="1421940"/>
-                  </a:lnTo>
-                  <a:lnTo>
-                    <a:pt x="4784995" y="1445472"/>
-                  </a:lnTo>
-                  <a:lnTo>
-                    <a:pt x="4873606" y="1468975"/>
-                  </a:lnTo>
-                  <a:lnTo>
-                    <a:pt x="4962217" y="1492451"/>
-                  </a:lnTo>
-                  <a:lnTo>
-                    <a:pt x="5050828" y="1515902"/>
-                  </a:lnTo>
-                  <a:lnTo>
-                    <a:pt x="5139439" y="1539330"/>
-                  </a:lnTo>
-                  <a:lnTo>
-                    <a:pt x="5228050" y="1562738"/>
-                  </a:lnTo>
-                  <a:lnTo>
-                    <a:pt x="5316661" y="1586127"/>
-                  </a:lnTo>
-                  <a:lnTo>
-                    <a:pt x="5405272" y="1609499"/>
-                  </a:lnTo>
-                  <a:lnTo>
-                    <a:pt x="5493883" y="1632855"/>
-                  </a:lnTo>
-                  <a:lnTo>
-                    <a:pt x="5582494" y="1656196"/>
-                  </a:lnTo>
-                  <a:lnTo>
-                    <a:pt x="5671105" y="1679524"/>
-                  </a:lnTo>
-                  <a:lnTo>
-                    <a:pt x="5759716" y="1702839"/>
-                  </a:lnTo>
-                  <a:lnTo>
-                    <a:pt x="5848327" y="1726142"/>
-                  </a:lnTo>
-                  <a:lnTo>
-                    <a:pt x="5936938" y="1749434"/>
-                  </a:lnTo>
-                  <a:lnTo>
-                    <a:pt x="6025549" y="1772717"/>
-                  </a:lnTo>
-                  <a:lnTo>
-                    <a:pt x="6114160" y="1795990"/>
-                  </a:lnTo>
-                  <a:lnTo>
-                    <a:pt x="6202771" y="1819254"/>
-                  </a:lnTo>
-                  <a:lnTo>
-                    <a:pt x="6291382" y="1842510"/>
-                  </a:lnTo>
-                  <a:lnTo>
-                    <a:pt x="6379993" y="1865759"/>
-                  </a:lnTo>
-                  <a:lnTo>
-                    <a:pt x="6468604" y="1889000"/>
-                  </a:lnTo>
-                  <a:lnTo>
-                    <a:pt x="6557215" y="1912235"/>
-                  </a:lnTo>
-                  <a:lnTo>
-                    <a:pt x="6645826" y="1935463"/>
-                  </a:lnTo>
-                  <a:lnTo>
-                    <a:pt x="6734437" y="1958686"/>
-                  </a:lnTo>
-                  <a:lnTo>
-                    <a:pt x="6823048" y="1981903"/>
-                  </a:lnTo>
-                  <a:lnTo>
-                    <a:pt x="6911659" y="2005114"/>
-                  </a:lnTo>
-                  <a:lnTo>
-                    <a:pt x="7000270" y="2028321"/>
+                    <a:pt x="88611" y="29545"/>
+                  </a:lnTo>
+                  <a:lnTo>
+                    <a:pt x="177222" y="59072"/>
+                  </a:lnTo>
+                  <a:lnTo>
+                    <a:pt x="265833" y="88580"/>
+                  </a:lnTo>
+                  <a:lnTo>
+                    <a:pt x="354444" y="118067"/>
+                  </a:lnTo>
+                  <a:lnTo>
+                    <a:pt x="443055" y="147530"/>
+                  </a:lnTo>
+                  <a:lnTo>
+                    <a:pt x="531666" y="176968"/>
+                  </a:lnTo>
+                  <a:lnTo>
+                    <a:pt x="620277" y="206378"/>
+                  </a:lnTo>
+                  <a:lnTo>
+                    <a:pt x="708888" y="235757"/>
+                  </a:lnTo>
+                  <a:lnTo>
+                    <a:pt x="797499" y="265102"/>
+                  </a:lnTo>
+                  <a:lnTo>
+                    <a:pt x="886110" y="294409"/>
+                  </a:lnTo>
+                  <a:lnTo>
+                    <a:pt x="974721" y="323675"/>
+                  </a:lnTo>
+                  <a:lnTo>
+                    <a:pt x="1063332" y="352894"/>
+                  </a:lnTo>
+                  <a:lnTo>
+                    <a:pt x="1151943" y="382063"/>
+                  </a:lnTo>
+                  <a:lnTo>
+                    <a:pt x="1240554" y="411174"/>
+                  </a:lnTo>
+                  <a:lnTo>
+                    <a:pt x="1329165" y="440221"/>
+                  </a:lnTo>
+                  <a:lnTo>
+                    <a:pt x="1417776" y="469198"/>
+                  </a:lnTo>
+                  <a:lnTo>
+                    <a:pt x="1506387" y="498095"/>
+                  </a:lnTo>
+                  <a:lnTo>
+                    <a:pt x="1594998" y="526904"/>
+                  </a:lnTo>
+                  <a:lnTo>
+                    <a:pt x="1683609" y="555614"/>
+                  </a:lnTo>
+                  <a:lnTo>
+                    <a:pt x="1772220" y="584212"/>
+                  </a:lnTo>
+                  <a:lnTo>
+                    <a:pt x="1860831" y="612688"/>
+                  </a:lnTo>
+                  <a:lnTo>
+                    <a:pt x="1949442" y="641026"/>
+                  </a:lnTo>
+                  <a:lnTo>
+                    <a:pt x="2038053" y="669213"/>
+                  </a:lnTo>
+                  <a:lnTo>
+                    <a:pt x="2126664" y="697232"/>
+                  </a:lnTo>
+                  <a:lnTo>
+                    <a:pt x="2215275" y="725069"/>
+                  </a:lnTo>
+                  <a:lnTo>
+                    <a:pt x="2303886" y="752707"/>
+                  </a:lnTo>
+                  <a:lnTo>
+                    <a:pt x="2392497" y="780133"/>
+                  </a:lnTo>
+                  <a:lnTo>
+                    <a:pt x="2481108" y="807334"/>
+                  </a:lnTo>
+                  <a:lnTo>
+                    <a:pt x="2569719" y="834299"/>
+                  </a:lnTo>
+                  <a:lnTo>
+                    <a:pt x="2658330" y="861021"/>
+                  </a:lnTo>
+                  <a:lnTo>
+                    <a:pt x="2746941" y="887498"/>
+                  </a:lnTo>
+                  <a:lnTo>
+                    <a:pt x="2835552" y="913731"/>
+                  </a:lnTo>
+                  <a:lnTo>
+                    <a:pt x="2924163" y="939723"/>
+                  </a:lnTo>
+                  <a:lnTo>
+                    <a:pt x="3012774" y="965483"/>
+                  </a:lnTo>
+                  <a:lnTo>
+                    <a:pt x="3101385" y="991022"/>
+                  </a:lnTo>
+                  <a:lnTo>
+                    <a:pt x="3189996" y="1016355"/>
+                  </a:lnTo>
+                  <a:lnTo>
+                    <a:pt x="3278607" y="1041495"/>
+                  </a:lnTo>
+                  <a:lnTo>
+                    <a:pt x="3367218" y="1066458"/>
+                  </a:lnTo>
+                  <a:lnTo>
+                    <a:pt x="3455829" y="1091260"/>
+                  </a:lnTo>
+                  <a:lnTo>
+                    <a:pt x="3544440" y="1115916"/>
+                  </a:lnTo>
+                  <a:lnTo>
+                    <a:pt x="3633051" y="1140441"/>
+                  </a:lnTo>
+                  <a:lnTo>
+                    <a:pt x="3721662" y="1164847"/>
+                  </a:lnTo>
+                  <a:lnTo>
+                    <a:pt x="3810273" y="1189147"/>
+                  </a:lnTo>
+                  <a:lnTo>
+                    <a:pt x="3898884" y="1213352"/>
+                  </a:lnTo>
+                  <a:lnTo>
+                    <a:pt x="3987495" y="1237473"/>
+                  </a:lnTo>
+                  <a:lnTo>
+                    <a:pt x="4076107" y="1261517"/>
+                  </a:lnTo>
+                  <a:lnTo>
+                    <a:pt x="4164718" y="1285493"/>
+                  </a:lnTo>
+                  <a:lnTo>
+                    <a:pt x="4253329" y="1309409"/>
+                  </a:lnTo>
+                  <a:lnTo>
+                    <a:pt x="4341940" y="1333269"/>
+                  </a:lnTo>
+                  <a:lnTo>
+                    <a:pt x="4430551" y="1357080"/>
+                  </a:lnTo>
+                  <a:lnTo>
+                    <a:pt x="4519162" y="1380847"/>
+                  </a:lnTo>
+                  <a:lnTo>
+                    <a:pt x="4607773" y="1404575"/>
+                  </a:lnTo>
+                  <a:lnTo>
+                    <a:pt x="4696384" y="1428265"/>
+                  </a:lnTo>
+                  <a:lnTo>
+                    <a:pt x="4784995" y="1451924"/>
+                  </a:lnTo>
+                  <a:lnTo>
+                    <a:pt x="4873606" y="1475552"/>
+                  </a:lnTo>
+                  <a:lnTo>
+                    <a:pt x="4962217" y="1499154"/>
+                  </a:lnTo>
+                  <a:lnTo>
+                    <a:pt x="5050828" y="1522730"/>
+                  </a:lnTo>
+                  <a:lnTo>
+                    <a:pt x="5139439" y="1546285"/>
+                  </a:lnTo>
+                  <a:lnTo>
+                    <a:pt x="5228050" y="1569818"/>
+                  </a:lnTo>
+                  <a:lnTo>
+                    <a:pt x="5316661" y="1593333"/>
+                  </a:lnTo>
+                  <a:lnTo>
+                    <a:pt x="5405272" y="1616831"/>
+                  </a:lnTo>
+                  <a:lnTo>
+                    <a:pt x="5493883" y="1640312"/>
+                  </a:lnTo>
+                  <a:lnTo>
+                    <a:pt x="5582494" y="1663779"/>
+                  </a:lnTo>
+                  <a:lnTo>
+                    <a:pt x="5671105" y="1687232"/>
+                  </a:lnTo>
+                  <a:lnTo>
+                    <a:pt x="5759716" y="1710673"/>
+                  </a:lnTo>
+                  <a:lnTo>
+                    <a:pt x="5848327" y="1734101"/>
+                  </a:lnTo>
+                  <a:lnTo>
+                    <a:pt x="5936938" y="1757520"/>
+                  </a:lnTo>
+                  <a:lnTo>
+                    <a:pt x="6025549" y="1780928"/>
+                  </a:lnTo>
+                  <a:lnTo>
+                    <a:pt x="6114160" y="1804326"/>
+                  </a:lnTo>
+                  <a:lnTo>
+                    <a:pt x="6202771" y="1827716"/>
+                  </a:lnTo>
+                  <a:lnTo>
+                    <a:pt x="6291382" y="1851098"/>
+                  </a:lnTo>
+                  <a:lnTo>
+                    <a:pt x="6379993" y="1874472"/>
+                  </a:lnTo>
+                  <a:lnTo>
+                    <a:pt x="6468604" y="1897839"/>
+                  </a:lnTo>
+                  <a:lnTo>
+                    <a:pt x="6557215" y="1921199"/>
+                  </a:lnTo>
+                  <a:lnTo>
+                    <a:pt x="6645826" y="1944553"/>
+                  </a:lnTo>
+                  <a:lnTo>
+                    <a:pt x="6734437" y="1967901"/>
+                  </a:lnTo>
+                  <a:lnTo>
+                    <a:pt x="6823048" y="1991244"/>
+                  </a:lnTo>
+                  <a:lnTo>
+                    <a:pt x="6911659" y="2014581"/>
+                  </a:lnTo>
+                  <a:lnTo>
+                    <a:pt x="7000270" y="2037913"/>
                   </a:lnTo>
                 </a:path>
               </a:pathLst>
@@ -15034,255 +14999,255 @@
         </p:sp>
         <p:sp>
           <p:nvSpPr>
-            <p:cNvPr id="345" name="pl345"/>
-            <p:cNvSpPr/>
-            <p:nvPr/>
-          </p:nvSpPr>
-          <p:spPr>
-            <a:xfrm>
-              <a:off x="1266926" y="2413389"/>
-              <a:ext cx="7000270" cy="2144064"/>
+            <p:cNvPr id="344" name="pl344"/>
+            <p:cNvSpPr/>
+            <p:nvPr/>
+          </p:nvSpPr>
+          <p:spPr>
+            <a:xfrm>
+              <a:off x="1266926" y="2407436"/>
+              <a:ext cx="7000270" cy="2152989"/>
             </a:xfrm>
             <a:custGeom>
               <a:avLst/>
               <a:pathLst>
-                <a:path w="7000270" h="2144064">
+                <a:path w="7000270" h="2152989">
                   <a:moveTo>
-                    <a:pt x="7000270" y="2144064"/>
+                    <a:pt x="7000270" y="2152989"/>
                   </a:moveTo>
                   <a:lnTo>
-                    <a:pt x="6911659" y="2114456"/>
-                  </a:lnTo>
-                  <a:lnTo>
-                    <a:pt x="6823048" y="2084853"/>
-                  </a:lnTo>
-                  <a:lnTo>
-                    <a:pt x="6734437" y="2055254"/>
-                  </a:lnTo>
-                  <a:lnTo>
-                    <a:pt x="6645826" y="2025662"/>
-                  </a:lnTo>
-                  <a:lnTo>
-                    <a:pt x="6557215" y="1996075"/>
-                  </a:lnTo>
-                  <a:lnTo>
-                    <a:pt x="6468604" y="1966495"/>
-                  </a:lnTo>
-                  <a:lnTo>
-                    <a:pt x="6379993" y="1936921"/>
-                  </a:lnTo>
-                  <a:lnTo>
-                    <a:pt x="6291382" y="1907355"/>
-                  </a:lnTo>
-                  <a:lnTo>
-                    <a:pt x="6202771" y="1877796"/>
-                  </a:lnTo>
-                  <a:lnTo>
-                    <a:pt x="6114160" y="1848245"/>
-                  </a:lnTo>
-                  <a:lnTo>
-                    <a:pt x="6025549" y="1818703"/>
-                  </a:lnTo>
-                  <a:lnTo>
-                    <a:pt x="5936938" y="1789171"/>
-                  </a:lnTo>
-                  <a:lnTo>
-                    <a:pt x="5848327" y="1759648"/>
-                  </a:lnTo>
-                  <a:lnTo>
-                    <a:pt x="5759716" y="1730136"/>
-                  </a:lnTo>
-                  <a:lnTo>
-                    <a:pt x="5671105" y="1700636"/>
-                  </a:lnTo>
-                  <a:lnTo>
-                    <a:pt x="5582494" y="1671149"/>
-                  </a:lnTo>
-                  <a:lnTo>
-                    <a:pt x="5493883" y="1641675"/>
-                  </a:lnTo>
-                  <a:lnTo>
-                    <a:pt x="5405272" y="1612216"/>
-                  </a:lnTo>
-                  <a:lnTo>
-                    <a:pt x="5316661" y="1582773"/>
-                  </a:lnTo>
-                  <a:lnTo>
-                    <a:pt x="5228050" y="1553347"/>
-                  </a:lnTo>
-                  <a:lnTo>
-                    <a:pt x="5139439" y="1523940"/>
-                  </a:lnTo>
-                  <a:lnTo>
-                    <a:pt x="5050828" y="1494553"/>
-                  </a:lnTo>
-                  <a:lnTo>
-                    <a:pt x="4962217" y="1465189"/>
-                  </a:lnTo>
-                  <a:lnTo>
-                    <a:pt x="4873606" y="1435850"/>
-                  </a:lnTo>
-                  <a:lnTo>
-                    <a:pt x="4784995" y="1406537"/>
-                  </a:lnTo>
-                  <a:lnTo>
-                    <a:pt x="4696384" y="1377255"/>
-                  </a:lnTo>
-                  <a:lnTo>
-                    <a:pt x="4607773" y="1348005"/>
-                  </a:lnTo>
-                  <a:lnTo>
-                    <a:pt x="4519162" y="1318791"/>
-                  </a:lnTo>
-                  <a:lnTo>
-                    <a:pt x="4430551" y="1289617"/>
-                  </a:lnTo>
-                  <a:lnTo>
-                    <a:pt x="4341940" y="1260487"/>
-                  </a:lnTo>
-                  <a:lnTo>
-                    <a:pt x="4253329" y="1231406"/>
-                  </a:lnTo>
-                  <a:lnTo>
-                    <a:pt x="4164718" y="1202380"/>
-                  </a:lnTo>
-                  <a:lnTo>
-                    <a:pt x="4076107" y="1173415"/>
-                  </a:lnTo>
-                  <a:lnTo>
-                    <a:pt x="3987495" y="1144518"/>
-                  </a:lnTo>
-                  <a:lnTo>
-                    <a:pt x="3898884" y="1115697"/>
-                  </a:lnTo>
-                  <a:lnTo>
-                    <a:pt x="3810273" y="1086961"/>
-                  </a:lnTo>
-                  <a:lnTo>
-                    <a:pt x="3721662" y="1058319"/>
-                  </a:lnTo>
-                  <a:lnTo>
-                    <a:pt x="3633051" y="1029783"/>
-                  </a:lnTo>
-                  <a:lnTo>
-                    <a:pt x="3544440" y="1001366"/>
-                  </a:lnTo>
-                  <a:lnTo>
-                    <a:pt x="3455829" y="973080"/>
-                  </a:lnTo>
-                  <a:lnTo>
-                    <a:pt x="3367218" y="944940"/>
-                  </a:lnTo>
-                  <a:lnTo>
-                    <a:pt x="3278607" y="916962"/>
-                  </a:lnTo>
-                  <a:lnTo>
-                    <a:pt x="3189996" y="889160"/>
-                  </a:lnTo>
-                  <a:lnTo>
-                    <a:pt x="3101385" y="861550"/>
-                  </a:lnTo>
-                  <a:lnTo>
-                    <a:pt x="3012774" y="834148"/>
-                  </a:lnTo>
-                  <a:lnTo>
-                    <a:pt x="2924163" y="806967"/>
-                  </a:lnTo>
-                  <a:lnTo>
-                    <a:pt x="2835552" y="780018"/>
-                  </a:lnTo>
-                  <a:lnTo>
-                    <a:pt x="2746941" y="753310"/>
-                  </a:lnTo>
-                  <a:lnTo>
-                    <a:pt x="2658330" y="726847"/>
-                  </a:lnTo>
-                  <a:lnTo>
-                    <a:pt x="2569719" y="700631"/>
-                  </a:lnTo>
-                  <a:lnTo>
-                    <a:pt x="2481108" y="674658"/>
-                  </a:lnTo>
-                  <a:lnTo>
-                    <a:pt x="2392497" y="648922"/>
-                  </a:lnTo>
-                  <a:lnTo>
-                    <a:pt x="2303886" y="623412"/>
-                  </a:lnTo>
-                  <a:lnTo>
-                    <a:pt x="2215275" y="598115"/>
-                  </a:lnTo>
-                  <a:lnTo>
-                    <a:pt x="2126664" y="573018"/>
-                  </a:lnTo>
-                  <a:lnTo>
-                    <a:pt x="2038053" y="548105"/>
-                  </a:lnTo>
-                  <a:lnTo>
-                    <a:pt x="1949442" y="523360"/>
-                  </a:lnTo>
-                  <a:lnTo>
-                    <a:pt x="1860831" y="498767"/>
-                  </a:lnTo>
-                  <a:lnTo>
-                    <a:pt x="1772220" y="474312"/>
-                  </a:lnTo>
-                  <a:lnTo>
-                    <a:pt x="1683609" y="449982"/>
-                  </a:lnTo>
-                  <a:lnTo>
-                    <a:pt x="1594998" y="425762"/>
-                  </a:lnTo>
-                  <a:lnTo>
-                    <a:pt x="1506387" y="401643"/>
-                  </a:lnTo>
-                  <a:lnTo>
-                    <a:pt x="1417776" y="377612"/>
-                  </a:lnTo>
-                  <a:lnTo>
-                    <a:pt x="1329165" y="353661"/>
-                  </a:lnTo>
-                  <a:lnTo>
-                    <a:pt x="1240554" y="329782"/>
-                  </a:lnTo>
-                  <a:lnTo>
-                    <a:pt x="1151943" y="305967"/>
-                  </a:lnTo>
-                  <a:lnTo>
-                    <a:pt x="1063332" y="282209"/>
-                  </a:lnTo>
-                  <a:lnTo>
-                    <a:pt x="974721" y="258502"/>
-                  </a:lnTo>
-                  <a:lnTo>
-                    <a:pt x="886110" y="234842"/>
-                  </a:lnTo>
-                  <a:lnTo>
-                    <a:pt x="797499" y="211223"/>
-                  </a:lnTo>
-                  <a:lnTo>
-                    <a:pt x="708888" y="187643"/>
-                  </a:lnTo>
-                  <a:lnTo>
-                    <a:pt x="620277" y="164096"/>
-                  </a:lnTo>
-                  <a:lnTo>
-                    <a:pt x="531666" y="140581"/>
-                  </a:lnTo>
-                  <a:lnTo>
-                    <a:pt x="443055" y="117093"/>
-                  </a:lnTo>
-                  <a:lnTo>
-                    <a:pt x="354444" y="93631"/>
-                  </a:lnTo>
-                  <a:lnTo>
-                    <a:pt x="265833" y="70193"/>
-                  </a:lnTo>
-                  <a:lnTo>
-                    <a:pt x="177222" y="46776"/>
-                  </a:lnTo>
-                  <a:lnTo>
-                    <a:pt x="88611" y="23379"/>
+                    <a:pt x="6911659" y="2123272"/>
+                  </a:lnTo>
+                  <a:lnTo>
+                    <a:pt x="6823048" y="2093560"/>
+                  </a:lnTo>
+                  <a:lnTo>
+                    <a:pt x="6734437" y="2063853"/>
+                  </a:lnTo>
+                  <a:lnTo>
+                    <a:pt x="6645826" y="2034151"/>
+                  </a:lnTo>
+                  <a:lnTo>
+                    <a:pt x="6557215" y="2004456"/>
+                  </a:lnTo>
+                  <a:lnTo>
+                    <a:pt x="6468604" y="1974767"/>
+                  </a:lnTo>
+                  <a:lnTo>
+                    <a:pt x="6379993" y="1945084"/>
+                  </a:lnTo>
+                  <a:lnTo>
+                    <a:pt x="6291382" y="1915409"/>
+                  </a:lnTo>
+                  <a:lnTo>
+                    <a:pt x="6202771" y="1885741"/>
+                  </a:lnTo>
+                  <a:lnTo>
+                    <a:pt x="6114160" y="1856082"/>
+                  </a:lnTo>
+                  <a:lnTo>
+                    <a:pt x="6025549" y="1826431"/>
+                  </a:lnTo>
+                  <a:lnTo>
+                    <a:pt x="5936938" y="1796790"/>
+                  </a:lnTo>
+                  <a:lnTo>
+                    <a:pt x="5848327" y="1767158"/>
+                  </a:lnTo>
+                  <a:lnTo>
+                    <a:pt x="5759716" y="1737538"/>
+                  </a:lnTo>
+                  <a:lnTo>
+                    <a:pt x="5671105" y="1707929"/>
+                  </a:lnTo>
+                  <a:lnTo>
+                    <a:pt x="5582494" y="1678333"/>
+                  </a:lnTo>
+                  <a:lnTo>
+                    <a:pt x="5493883" y="1648750"/>
+                  </a:lnTo>
+                  <a:lnTo>
+                    <a:pt x="5405272" y="1619182"/>
+                  </a:lnTo>
+                  <a:lnTo>
+                    <a:pt x="5316661" y="1589630"/>
+                  </a:lnTo>
+                  <a:lnTo>
+                    <a:pt x="5228050" y="1560096"/>
+                  </a:lnTo>
+                  <a:lnTo>
+                    <a:pt x="5139439" y="1530580"/>
+                  </a:lnTo>
+                  <a:lnTo>
+                    <a:pt x="5050828" y="1501085"/>
+                  </a:lnTo>
+                  <a:lnTo>
+                    <a:pt x="4962217" y="1471612"/>
+                  </a:lnTo>
+                  <a:lnTo>
+                    <a:pt x="4873606" y="1442164"/>
+                  </a:lnTo>
+                  <a:lnTo>
+                    <a:pt x="4784995" y="1412743"/>
+                  </a:lnTo>
+                  <a:lnTo>
+                    <a:pt x="4696384" y="1383352"/>
+                  </a:lnTo>
+                  <a:lnTo>
+                    <a:pt x="4607773" y="1353994"/>
+                  </a:lnTo>
+                  <a:lnTo>
+                    <a:pt x="4519162" y="1324671"/>
+                  </a:lnTo>
+                  <a:lnTo>
+                    <a:pt x="4430551" y="1295389"/>
+                  </a:lnTo>
+                  <a:lnTo>
+                    <a:pt x="4341940" y="1266151"/>
+                  </a:lnTo>
+                  <a:lnTo>
+                    <a:pt x="4253329" y="1236962"/>
+                  </a:lnTo>
+                  <a:lnTo>
+                    <a:pt x="4164718" y="1207828"/>
+                  </a:lnTo>
+                  <a:lnTo>
+                    <a:pt x="4076107" y="1178755"/>
+                  </a:lnTo>
+                  <a:lnTo>
+                    <a:pt x="3987495" y="1149750"/>
+                  </a:lnTo>
+                  <a:lnTo>
+                    <a:pt x="3898884" y="1120820"/>
+                  </a:lnTo>
+                  <a:lnTo>
+                    <a:pt x="3810273" y="1091976"/>
+                  </a:lnTo>
+                  <a:lnTo>
+                    <a:pt x="3721662" y="1063227"/>
+                  </a:lnTo>
+                  <a:lnTo>
+                    <a:pt x="3633051" y="1034584"/>
+                  </a:lnTo>
+                  <a:lnTo>
+                    <a:pt x="3544440" y="1006059"/>
+                  </a:lnTo>
+                  <a:lnTo>
+                    <a:pt x="3455829" y="977666"/>
+                  </a:lnTo>
+                  <a:lnTo>
+                    <a:pt x="3367218" y="949418"/>
+                  </a:lnTo>
+                  <a:lnTo>
+                    <a:pt x="3278607" y="921332"/>
+                  </a:lnTo>
+                  <a:lnTo>
+                    <a:pt x="3189996" y="893423"/>
+                  </a:lnTo>
+                  <a:lnTo>
+                    <a:pt x="3101385" y="865706"/>
+                  </a:lnTo>
+                  <a:lnTo>
+                    <a:pt x="3012774" y="838196"/>
+                  </a:lnTo>
+                  <a:lnTo>
+                    <a:pt x="2924163" y="810907"/>
+                  </a:lnTo>
+                  <a:lnTo>
+                    <a:pt x="2835552" y="783849"/>
+                  </a:lnTo>
+                  <a:lnTo>
+                    <a:pt x="2746941" y="757032"/>
+                  </a:lnTo>
+                  <a:lnTo>
+                    <a:pt x="2658330" y="730460"/>
+                  </a:lnTo>
+                  <a:lnTo>
+                    <a:pt x="2569719" y="704133"/>
+                  </a:lnTo>
+                  <a:lnTo>
+                    <a:pt x="2481108" y="678049"/>
+                  </a:lnTo>
+                  <a:lnTo>
+                    <a:pt x="2392497" y="652200"/>
+                  </a:lnTo>
+                  <a:lnTo>
+                    <a:pt x="2303886" y="626576"/>
+                  </a:lnTo>
+                  <a:lnTo>
+                    <a:pt x="2215275" y="601165"/>
+                  </a:lnTo>
+                  <a:lnTo>
+                    <a:pt x="2126664" y="575952"/>
+                  </a:lnTo>
+                  <a:lnTo>
+                    <a:pt x="2038053" y="550922"/>
+                  </a:lnTo>
+                  <a:lnTo>
+                    <a:pt x="1949442" y="526060"/>
+                  </a:lnTo>
+                  <a:lnTo>
+                    <a:pt x="1860831" y="501349"/>
+                  </a:lnTo>
+                  <a:lnTo>
+                    <a:pt x="1772220" y="476775"/>
+                  </a:lnTo>
+                  <a:lnTo>
+                    <a:pt x="1683609" y="452324"/>
+                  </a:lnTo>
+                  <a:lnTo>
+                    <a:pt x="1594998" y="427984"/>
+                  </a:lnTo>
+                  <a:lnTo>
+                    <a:pt x="1506387" y="403743"/>
+                  </a:lnTo>
+                  <a:lnTo>
+                    <a:pt x="1417776" y="379591"/>
+                  </a:lnTo>
+                  <a:lnTo>
+                    <a:pt x="1329165" y="355519"/>
+                  </a:lnTo>
+                  <a:lnTo>
+                    <a:pt x="1240554" y="331517"/>
+                  </a:lnTo>
+                  <a:lnTo>
+                    <a:pt x="1151943" y="307579"/>
+                  </a:lnTo>
+                  <a:lnTo>
+                    <a:pt x="1063332" y="283698"/>
+                  </a:lnTo>
+                  <a:lnTo>
+                    <a:pt x="974721" y="259868"/>
+                  </a:lnTo>
+                  <a:lnTo>
+                    <a:pt x="886110" y="236084"/>
+                  </a:lnTo>
+                  <a:lnTo>
+                    <a:pt x="797499" y="212342"/>
+                  </a:lnTo>
+                  <a:lnTo>
+                    <a:pt x="708888" y="188638"/>
+                  </a:lnTo>
+                  <a:lnTo>
+                    <a:pt x="620277" y="164967"/>
+                  </a:lnTo>
+                  <a:lnTo>
+                    <a:pt x="531666" y="141327"/>
+                  </a:lnTo>
+                  <a:lnTo>
+                    <a:pt x="443055" y="117716"/>
+                  </a:lnTo>
+                  <a:lnTo>
+                    <a:pt x="354444" y="94130"/>
+                  </a:lnTo>
+                  <a:lnTo>
+                    <a:pt x="265833" y="70567"/>
+                  </a:lnTo>
+                  <a:lnTo>
+                    <a:pt x="177222" y="47025"/>
+                  </a:lnTo>
+                  <a:lnTo>
+                    <a:pt x="88611" y="23504"/>
                   </a:lnTo>
                   <a:lnTo>
                     <a:pt x="0" y="0"/>
@@ -15299,258 +15264,258 @@
         </p:sp>
         <p:sp>
           <p:nvSpPr>
-            <p:cNvPr id="346" name="pl346"/>
-            <p:cNvSpPr/>
-            <p:nvPr/>
-          </p:nvSpPr>
-          <p:spPr>
-            <a:xfrm>
-              <a:off x="1266926" y="2303294"/>
-              <a:ext cx="7000270" cy="2086193"/>
+            <p:cNvPr id="345" name="pl345"/>
+            <p:cNvSpPr/>
+            <p:nvPr/>
+          </p:nvSpPr>
+          <p:spPr>
+            <a:xfrm>
+              <a:off x="1266926" y="2297514"/>
+              <a:ext cx="7000270" cy="2095451"/>
             </a:xfrm>
             <a:custGeom>
               <a:avLst/>
               <a:pathLst>
-                <a:path w="7000270" h="2086193">
+                <a:path w="7000270" h="2095451">
                   <a:moveTo>
                     <a:pt x="0" y="0"/>
                   </a:moveTo>
                   <a:lnTo>
-                    <a:pt x="88611" y="26407"/>
-                  </a:lnTo>
-                  <a:lnTo>
-                    <a:pt x="177222" y="52815"/>
-                  </a:lnTo>
-                  <a:lnTo>
-                    <a:pt x="265833" y="79222"/>
-                  </a:lnTo>
-                  <a:lnTo>
-                    <a:pt x="354444" y="105630"/>
-                  </a:lnTo>
-                  <a:lnTo>
-                    <a:pt x="443055" y="132037"/>
-                  </a:lnTo>
-                  <a:lnTo>
-                    <a:pt x="531666" y="158445"/>
-                  </a:lnTo>
-                  <a:lnTo>
-                    <a:pt x="620277" y="184852"/>
-                  </a:lnTo>
-                  <a:lnTo>
-                    <a:pt x="708888" y="211260"/>
-                  </a:lnTo>
-                  <a:lnTo>
-                    <a:pt x="797499" y="237667"/>
-                  </a:lnTo>
-                  <a:lnTo>
-                    <a:pt x="886110" y="264075"/>
-                  </a:lnTo>
-                  <a:lnTo>
-                    <a:pt x="974721" y="290482"/>
-                  </a:lnTo>
-                  <a:lnTo>
-                    <a:pt x="1063332" y="316890"/>
-                  </a:lnTo>
-                  <a:lnTo>
-                    <a:pt x="1151943" y="343297"/>
-                  </a:lnTo>
-                  <a:lnTo>
-                    <a:pt x="1240554" y="369705"/>
-                  </a:lnTo>
-                  <a:lnTo>
-                    <a:pt x="1329165" y="396112"/>
-                  </a:lnTo>
-                  <a:lnTo>
-                    <a:pt x="1417776" y="422520"/>
-                  </a:lnTo>
-                  <a:lnTo>
-                    <a:pt x="1506387" y="448927"/>
-                  </a:lnTo>
-                  <a:lnTo>
-                    <a:pt x="1594998" y="475335"/>
-                  </a:lnTo>
-                  <a:lnTo>
-                    <a:pt x="1683609" y="501742"/>
-                  </a:lnTo>
-                  <a:lnTo>
-                    <a:pt x="1772220" y="528150"/>
-                  </a:lnTo>
-                  <a:lnTo>
-                    <a:pt x="1860831" y="554557"/>
-                  </a:lnTo>
-                  <a:lnTo>
-                    <a:pt x="1949442" y="580965"/>
-                  </a:lnTo>
-                  <a:lnTo>
-                    <a:pt x="2038053" y="607372"/>
-                  </a:lnTo>
-                  <a:lnTo>
-                    <a:pt x="2126664" y="633780"/>
-                  </a:lnTo>
-                  <a:lnTo>
-                    <a:pt x="2215275" y="660187"/>
-                  </a:lnTo>
-                  <a:lnTo>
-                    <a:pt x="2303886" y="686595"/>
-                  </a:lnTo>
-                  <a:lnTo>
-                    <a:pt x="2392497" y="713002"/>
-                  </a:lnTo>
-                  <a:lnTo>
-                    <a:pt x="2481108" y="739410"/>
-                  </a:lnTo>
-                  <a:lnTo>
-                    <a:pt x="2569719" y="765817"/>
-                  </a:lnTo>
-                  <a:lnTo>
-                    <a:pt x="2658330" y="792225"/>
-                  </a:lnTo>
-                  <a:lnTo>
-                    <a:pt x="2746941" y="818632"/>
-                  </a:lnTo>
-                  <a:lnTo>
-                    <a:pt x="2835552" y="845040"/>
-                  </a:lnTo>
-                  <a:lnTo>
-                    <a:pt x="2924163" y="871447"/>
-                  </a:lnTo>
-                  <a:lnTo>
-                    <a:pt x="3012774" y="897855"/>
-                  </a:lnTo>
-                  <a:lnTo>
-                    <a:pt x="3101385" y="924262"/>
-                  </a:lnTo>
-                  <a:lnTo>
-                    <a:pt x="3189996" y="950670"/>
-                  </a:lnTo>
-                  <a:lnTo>
-                    <a:pt x="3278607" y="977077"/>
-                  </a:lnTo>
-                  <a:lnTo>
-                    <a:pt x="3367218" y="1003485"/>
-                  </a:lnTo>
-                  <a:lnTo>
-                    <a:pt x="3455829" y="1029892"/>
-                  </a:lnTo>
-                  <a:lnTo>
-                    <a:pt x="3544440" y="1056300"/>
-                  </a:lnTo>
-                  <a:lnTo>
-                    <a:pt x="3633051" y="1082707"/>
-                  </a:lnTo>
-                  <a:lnTo>
-                    <a:pt x="3721662" y="1109115"/>
-                  </a:lnTo>
-                  <a:lnTo>
-                    <a:pt x="3810273" y="1135522"/>
-                  </a:lnTo>
-                  <a:lnTo>
-                    <a:pt x="3898884" y="1161930"/>
-                  </a:lnTo>
-                  <a:lnTo>
-                    <a:pt x="3987495" y="1188337"/>
-                  </a:lnTo>
-                  <a:lnTo>
-                    <a:pt x="4076107" y="1214745"/>
-                  </a:lnTo>
-                  <a:lnTo>
-                    <a:pt x="4164718" y="1241152"/>
-                  </a:lnTo>
-                  <a:lnTo>
-                    <a:pt x="4253329" y="1267560"/>
-                  </a:lnTo>
-                  <a:lnTo>
-                    <a:pt x="4341940" y="1293967"/>
-                  </a:lnTo>
-                  <a:lnTo>
-                    <a:pt x="4430551" y="1320375"/>
-                  </a:lnTo>
-                  <a:lnTo>
-                    <a:pt x="4519162" y="1346782"/>
-                  </a:lnTo>
-                  <a:lnTo>
-                    <a:pt x="4607773" y="1373190"/>
-                  </a:lnTo>
-                  <a:lnTo>
-                    <a:pt x="4696384" y="1399597"/>
-                  </a:lnTo>
-                  <a:lnTo>
-                    <a:pt x="4784995" y="1426005"/>
-                  </a:lnTo>
-                  <a:lnTo>
-                    <a:pt x="4873606" y="1452412"/>
-                  </a:lnTo>
-                  <a:lnTo>
-                    <a:pt x="4962217" y="1478820"/>
-                  </a:lnTo>
-                  <a:lnTo>
-                    <a:pt x="5050828" y="1505227"/>
-                  </a:lnTo>
-                  <a:lnTo>
-                    <a:pt x="5139439" y="1531635"/>
-                  </a:lnTo>
-                  <a:lnTo>
-                    <a:pt x="5228050" y="1558042"/>
-                  </a:lnTo>
-                  <a:lnTo>
-                    <a:pt x="5316661" y="1584450"/>
-                  </a:lnTo>
-                  <a:lnTo>
-                    <a:pt x="5405272" y="1610857"/>
-                  </a:lnTo>
-                  <a:lnTo>
-                    <a:pt x="5493883" y="1637265"/>
-                  </a:lnTo>
-                  <a:lnTo>
-                    <a:pt x="5582494" y="1663672"/>
-                  </a:lnTo>
-                  <a:lnTo>
-                    <a:pt x="5671105" y="1690080"/>
-                  </a:lnTo>
-                  <a:lnTo>
-                    <a:pt x="5759716" y="1716488"/>
-                  </a:lnTo>
-                  <a:lnTo>
-                    <a:pt x="5848327" y="1742895"/>
-                  </a:lnTo>
-                  <a:lnTo>
-                    <a:pt x="5936938" y="1769303"/>
-                  </a:lnTo>
-                  <a:lnTo>
-                    <a:pt x="6025549" y="1795710"/>
-                  </a:lnTo>
-                  <a:lnTo>
-                    <a:pt x="6114160" y="1822118"/>
-                  </a:lnTo>
-                  <a:lnTo>
-                    <a:pt x="6202771" y="1848525"/>
-                  </a:lnTo>
-                  <a:lnTo>
-                    <a:pt x="6291382" y="1874933"/>
-                  </a:lnTo>
-                  <a:lnTo>
-                    <a:pt x="6379993" y="1901340"/>
-                  </a:lnTo>
-                  <a:lnTo>
-                    <a:pt x="6468604" y="1927748"/>
-                  </a:lnTo>
-                  <a:lnTo>
-                    <a:pt x="6557215" y="1954155"/>
-                  </a:lnTo>
-                  <a:lnTo>
-                    <a:pt x="6645826" y="1980563"/>
-                  </a:lnTo>
-                  <a:lnTo>
-                    <a:pt x="6734437" y="2006970"/>
-                  </a:lnTo>
-                  <a:lnTo>
-                    <a:pt x="6823048" y="2033378"/>
-                  </a:lnTo>
-                  <a:lnTo>
-                    <a:pt x="6911659" y="2059785"/>
-                  </a:lnTo>
-                  <a:lnTo>
-                    <a:pt x="7000270" y="2086193"/>
+                    <a:pt x="88611" y="26524"/>
+                  </a:lnTo>
+                  <a:lnTo>
+                    <a:pt x="177222" y="53049"/>
+                  </a:lnTo>
+                  <a:lnTo>
+                    <a:pt x="265833" y="79574"/>
+                  </a:lnTo>
+                  <a:lnTo>
+                    <a:pt x="354444" y="106098"/>
+                  </a:lnTo>
+                  <a:lnTo>
+                    <a:pt x="443055" y="132623"/>
+                  </a:lnTo>
+                  <a:lnTo>
+                    <a:pt x="531666" y="159148"/>
+                  </a:lnTo>
+                  <a:lnTo>
+                    <a:pt x="620277" y="185672"/>
+                  </a:lnTo>
+                  <a:lnTo>
+                    <a:pt x="708888" y="212197"/>
+                  </a:lnTo>
+                  <a:lnTo>
+                    <a:pt x="797499" y="238722"/>
+                  </a:lnTo>
+                  <a:lnTo>
+                    <a:pt x="886110" y="265247"/>
+                  </a:lnTo>
+                  <a:lnTo>
+                    <a:pt x="974721" y="291771"/>
+                  </a:lnTo>
+                  <a:lnTo>
+                    <a:pt x="1063332" y="318296"/>
+                  </a:lnTo>
+                  <a:lnTo>
+                    <a:pt x="1151943" y="344821"/>
+                  </a:lnTo>
+                  <a:lnTo>
+                    <a:pt x="1240554" y="371345"/>
+                  </a:lnTo>
+                  <a:lnTo>
+                    <a:pt x="1329165" y="397870"/>
+                  </a:lnTo>
+                  <a:lnTo>
+                    <a:pt x="1417776" y="424395"/>
+                  </a:lnTo>
+                  <a:lnTo>
+                    <a:pt x="1506387" y="450919"/>
+                  </a:lnTo>
+                  <a:lnTo>
+                    <a:pt x="1594998" y="477444"/>
+                  </a:lnTo>
+                  <a:lnTo>
+                    <a:pt x="1683609" y="503969"/>
+                  </a:lnTo>
+                  <a:lnTo>
+                    <a:pt x="1772220" y="530494"/>
+                  </a:lnTo>
+                  <a:lnTo>
+                    <a:pt x="1860831" y="557018"/>
+                  </a:lnTo>
+                  <a:lnTo>
+                    <a:pt x="1949442" y="583543"/>
+                  </a:lnTo>
+                  <a:lnTo>
+                    <a:pt x="2038053" y="610068"/>
+                  </a:lnTo>
+                  <a:lnTo>
+                    <a:pt x="2126664" y="636592"/>
+                  </a:lnTo>
+                  <a:lnTo>
+                    <a:pt x="2215275" y="663117"/>
+                  </a:lnTo>
+                  <a:lnTo>
+                    <a:pt x="2303886" y="689642"/>
+                  </a:lnTo>
+                  <a:lnTo>
+                    <a:pt x="2392497" y="716166"/>
+                  </a:lnTo>
+                  <a:lnTo>
+                    <a:pt x="2481108" y="742691"/>
+                  </a:lnTo>
+                  <a:lnTo>
+                    <a:pt x="2569719" y="769216"/>
+                  </a:lnTo>
+                  <a:lnTo>
+                    <a:pt x="2658330" y="795741"/>
+                  </a:lnTo>
+                  <a:lnTo>
+                    <a:pt x="2746941" y="822265"/>
+                  </a:lnTo>
+                  <a:lnTo>
+                    <a:pt x="2835552" y="848790"/>
+                  </a:lnTo>
+                  <a:lnTo>
+                    <a:pt x="2924163" y="875315"/>
+                  </a:lnTo>
+                  <a:lnTo>
+                    <a:pt x="3012774" y="901839"/>
+                  </a:lnTo>
+                  <a:lnTo>
+                    <a:pt x="3101385" y="928364"/>
+                  </a:lnTo>
+                  <a:lnTo>
+                    <a:pt x="3189996" y="954889"/>
+                  </a:lnTo>
+                  <a:lnTo>
+                    <a:pt x="3278607" y="981413"/>
+                  </a:lnTo>
+                  <a:lnTo>
+                    <a:pt x="3367218" y="1007938"/>
+                  </a:lnTo>
+                  <a:lnTo>
+                    <a:pt x="3455829" y="1034463"/>
+                  </a:lnTo>
+                  <a:lnTo>
+                    <a:pt x="3544440" y="1060988"/>
+                  </a:lnTo>
+                  <a:lnTo>
+                    <a:pt x="3633051" y="1087512"/>
+                  </a:lnTo>
+                  <a:lnTo>
+                    <a:pt x="3721662" y="1114037"/>
+                  </a:lnTo>
+                  <a:lnTo>
+                    <a:pt x="3810273" y="1140562"/>
+                  </a:lnTo>
+                  <a:lnTo>
+                    <a:pt x="3898884" y="1167086"/>
+                  </a:lnTo>
+                  <a:lnTo>
+                    <a:pt x="3987495" y="1193611"/>
+                  </a:lnTo>
+                  <a:lnTo>
+                    <a:pt x="4076107" y="1220136"/>
+                  </a:lnTo>
+                  <a:lnTo>
+                    <a:pt x="4164718" y="1246661"/>
+                  </a:lnTo>
+                  <a:lnTo>
+                    <a:pt x="4253329" y="1273185"/>
+                  </a:lnTo>
+                  <a:lnTo>
+                    <a:pt x="4341940" y="1299710"/>
+                  </a:lnTo>
+                  <a:lnTo>
+                    <a:pt x="4430551" y="1326235"/>
+                  </a:lnTo>
+                  <a:lnTo>
+                    <a:pt x="4519162" y="1352759"/>
+                  </a:lnTo>
+                  <a:lnTo>
+                    <a:pt x="4607773" y="1379284"/>
+                  </a:lnTo>
+                  <a:lnTo>
+                    <a:pt x="4696384" y="1405809"/>
+                  </a:lnTo>
+                  <a:lnTo>
+                    <a:pt x="4784995" y="1432333"/>
+                  </a:lnTo>
+                  <a:lnTo>
+                    <a:pt x="4873606" y="1458858"/>
+                  </a:lnTo>
+                  <a:lnTo>
+                    <a:pt x="4962217" y="1485383"/>
+                  </a:lnTo>
+                  <a:lnTo>
+                    <a:pt x="5050828" y="1511908"/>
+                  </a:lnTo>
+                  <a:lnTo>
+                    <a:pt x="5139439" y="1538432"/>
+                  </a:lnTo>
+                  <a:lnTo>
+                    <a:pt x="5228050" y="1564957"/>
+                  </a:lnTo>
+                  <a:lnTo>
+                    <a:pt x="5316661" y="1591482"/>
+                  </a:lnTo>
+                  <a:lnTo>
+                    <a:pt x="5405272" y="1618006"/>
+                  </a:lnTo>
+                  <a:lnTo>
+                    <a:pt x="5493883" y="1644531"/>
+                  </a:lnTo>
+                  <a:lnTo>
+                    <a:pt x="5582494" y="1671056"/>
+                  </a:lnTo>
+                  <a:lnTo>
+                    <a:pt x="5671105" y="1697580"/>
+                  </a:lnTo>
+                  <a:lnTo>
+                    <a:pt x="5759716" y="1724105"/>
+                  </a:lnTo>
+                  <a:lnTo>
+                    <a:pt x="5848327" y="1750630"/>
+                  </a:lnTo>
+                  <a:lnTo>
+                    <a:pt x="5936938" y="1777155"/>
+                  </a:lnTo>
+                  <a:lnTo>
+                    <a:pt x="6025549" y="1803679"/>
+                  </a:lnTo>
+                  <a:lnTo>
+                    <a:pt x="6114160" y="1830204"/>
+                  </a:lnTo>
+                  <a:lnTo>
+                    <a:pt x="6202771" y="1856729"/>
+                  </a:lnTo>
+                  <a:lnTo>
+                    <a:pt x="6291382" y="1883253"/>
+                  </a:lnTo>
+                  <a:lnTo>
+                    <a:pt x="6379993" y="1909778"/>
+                  </a:lnTo>
+                  <a:lnTo>
+                    <a:pt x="6468604" y="1936303"/>
+                  </a:lnTo>
+                  <a:lnTo>
+                    <a:pt x="6557215" y="1962827"/>
+                  </a:lnTo>
+                  <a:lnTo>
+                    <a:pt x="6645826" y="1989352"/>
+                  </a:lnTo>
+                  <a:lnTo>
+                    <a:pt x="6734437" y="2015877"/>
+                  </a:lnTo>
+                  <a:lnTo>
+                    <a:pt x="6823048" y="2042402"/>
+                  </a:lnTo>
+                  <a:lnTo>
+                    <a:pt x="6911659" y="2068926"/>
+                  </a:lnTo>
+                  <a:lnTo>
+                    <a:pt x="7000270" y="2095451"/>
                   </a:lnTo>
                 </a:path>
               </a:pathLst>
@@ -15573,7 +15538,7 @@
         </p:sp>
         <p:sp>
           <p:nvSpPr>
-            <p:cNvPr id="347" name="pl347"/>
+            <p:cNvPr id="346" name="pl346"/>
             <p:cNvSpPr/>
             <p:nvPr/>
           </p:nvSpPr>
@@ -15616,7 +15581,7 @@
         </p:sp>
         <p:sp>
           <p:nvSpPr>
-            <p:cNvPr id="348" name="tx348"/>
+            <p:cNvPr id="347" name="tx347"/>
             <p:cNvSpPr/>
             <p:nvPr/>
           </p:nvSpPr>
@@ -15662,7 +15627,7 @@
         </p:sp>
         <p:sp>
           <p:nvSpPr>
-            <p:cNvPr id="349" name="tx349"/>
+            <p:cNvPr id="348" name="tx348"/>
             <p:cNvSpPr/>
             <p:nvPr/>
           </p:nvSpPr>
@@ -15708,7 +15673,7 @@
         </p:sp>
         <p:sp>
           <p:nvSpPr>
-            <p:cNvPr id="350" name="tx350"/>
+            <p:cNvPr id="349" name="tx349"/>
             <p:cNvSpPr/>
             <p:nvPr/>
           </p:nvSpPr>
@@ -15754,7 +15719,7 @@
         </p:sp>
         <p:sp>
           <p:nvSpPr>
-            <p:cNvPr id="351" name="tx351"/>
+            <p:cNvPr id="350" name="tx350"/>
             <p:cNvSpPr/>
             <p:nvPr/>
           </p:nvSpPr>
@@ -15800,7 +15765,7 @@
         </p:sp>
         <p:sp>
           <p:nvSpPr>
-            <p:cNvPr id="352" name="tx352"/>
+            <p:cNvPr id="351" name="tx351"/>
             <p:cNvSpPr/>
             <p:nvPr/>
           </p:nvSpPr>
@@ -15846,7 +15811,7 @@
         </p:sp>
         <p:sp>
           <p:nvSpPr>
-            <p:cNvPr id="353" name="tx353"/>
+            <p:cNvPr id="352" name="tx352"/>
             <p:cNvSpPr/>
             <p:nvPr/>
           </p:nvSpPr>
@@ -15892,7 +15857,7 @@
         </p:sp>
         <p:sp>
           <p:nvSpPr>
-            <p:cNvPr id="354" name="tx354"/>
+            <p:cNvPr id="353" name="tx353"/>
             <p:cNvSpPr/>
             <p:nvPr/>
           </p:nvSpPr>
@@ -15938,7 +15903,7 @@
         </p:sp>
         <p:sp>
           <p:nvSpPr>
-            <p:cNvPr id="355" name="tx355"/>
+            <p:cNvPr id="354" name="tx354"/>
             <p:cNvSpPr/>
             <p:nvPr/>
           </p:nvSpPr>
@@ -15984,7 +15949,7 @@
         </p:sp>
         <p:sp>
           <p:nvSpPr>
-            <p:cNvPr id="356" name="tx356"/>
+            <p:cNvPr id="355" name="tx355"/>
             <p:cNvSpPr/>
             <p:nvPr/>
           </p:nvSpPr>
@@ -16030,7 +15995,7 @@
         </p:sp>
         <p:sp>
           <p:nvSpPr>
-            <p:cNvPr id="357" name="tx357"/>
+            <p:cNvPr id="356" name="tx356"/>
             <p:cNvSpPr/>
             <p:nvPr/>
           </p:nvSpPr>
@@ -16076,7 +16041,7 @@
         </p:sp>
         <p:sp>
           <p:nvSpPr>
-            <p:cNvPr id="358" name="tx358"/>
+            <p:cNvPr id="357" name="tx357"/>
             <p:cNvSpPr/>
             <p:nvPr/>
           </p:nvSpPr>
